--- a/FINALAICTPRROJECT.ppt.pptx
+++ b/FINALAICTPRROJECT.ppt.pptx
@@ -5389,6 +5389,42 @@
           </a:prstGeom>
         </p:spPr>
       </p:pic>
+      <p:pic>
+        <p:nvPicPr>
+          <p:cNvPr id="2" name="Picture 1">
+            <a:extLst>
+              <a:ext uri="{FF2B5EF4-FFF2-40B4-BE49-F238E27FC236}">
+                <a16:creationId xmlns:a16="http://schemas.microsoft.com/office/drawing/2014/main" id="{B660C48C-8238-4718-0870-E54BB9B86CED}"/>
+              </a:ext>
+            </a:extLst>
+          </p:cNvPr>
+          <p:cNvPicPr>
+            <a:picLocks noChangeAspect="1"/>
+          </p:cNvPicPr>
+          <p:nvPr/>
+        </p:nvPicPr>
+        <p:blipFill>
+          <a:blip r:embed="rId11">
+            <a:extLst>
+              <a:ext uri="{28A0092B-C50C-407E-A947-70E740481C1C}">
+                <a14:useLocalDpi xmlns:a14="http://schemas.microsoft.com/office/drawing/2010/main" val="0"/>
+              </a:ext>
+            </a:extLst>
+          </a:blip>
+          <a:stretch>
+            <a:fillRect/>
+          </a:stretch>
+        </p:blipFill>
+        <p:spPr>
+          <a:xfrm>
+            <a:off x="6642102" y="3604086"/>
+            <a:ext cx="3667408" cy="2685505"/>
+          </a:xfrm>
+          <a:prstGeom prst="rect">
+            <a:avLst/>
+          </a:prstGeom>
+        </p:spPr>
+      </p:pic>
     </p:spTree>
     <p:extLst>
       <p:ext uri="{BB962C8B-B14F-4D97-AF65-F5344CB8AC3E}">
@@ -6145,6 +6181,42 @@
           <a:xfrm rot="11040610">
             <a:off x="535168" y="2432113"/>
             <a:ext cx="1055797" cy="1055797"/>
+          </a:xfrm>
+          <a:prstGeom prst="rect">
+            <a:avLst/>
+          </a:prstGeom>
+        </p:spPr>
+      </p:pic>
+      <p:pic>
+        <p:nvPicPr>
+          <p:cNvPr id="17" name="Picture 16">
+            <a:extLst>
+              <a:ext uri="{FF2B5EF4-FFF2-40B4-BE49-F238E27FC236}">
+                <a16:creationId xmlns:a16="http://schemas.microsoft.com/office/drawing/2014/main" id="{329A1D86-5F7B-FD62-4668-65160E31167E}"/>
+              </a:ext>
+            </a:extLst>
+          </p:cNvPr>
+          <p:cNvPicPr>
+            <a:picLocks noChangeAspect="1"/>
+          </p:cNvPicPr>
+          <p:nvPr/>
+        </p:nvPicPr>
+        <p:blipFill>
+          <a:blip r:embed="rId12">
+            <a:extLst>
+              <a:ext uri="{28A0092B-C50C-407E-A947-70E740481C1C}">
+                <a14:useLocalDpi xmlns:a14="http://schemas.microsoft.com/office/drawing/2010/main" val="0"/>
+              </a:ext>
+            </a:extLst>
+          </a:blip>
+          <a:stretch>
+            <a:fillRect/>
+          </a:stretch>
+        </p:blipFill>
+        <p:spPr>
+          <a:xfrm>
+            <a:off x="5861030" y="3525732"/>
+            <a:ext cx="5029364" cy="3001556"/>
           </a:xfrm>
           <a:prstGeom prst="rect">
             <a:avLst/>
@@ -6945,6 +7017,36 @@
           </a:prstGeom>
         </p:spPr>
       </p:pic>
+      <p:pic>
+        <p:nvPicPr>
+          <p:cNvPr id="8" name="Picture 7">
+            <a:extLst>
+              <a:ext uri="{FF2B5EF4-FFF2-40B4-BE49-F238E27FC236}">
+                <a16:creationId xmlns:a16="http://schemas.microsoft.com/office/drawing/2014/main" id="{974B1E8C-4959-1F5D-A646-C02DDA6B842B}"/>
+              </a:ext>
+            </a:extLst>
+          </p:cNvPr>
+          <p:cNvPicPr>
+            <a:picLocks noChangeAspect="1"/>
+          </p:cNvPicPr>
+          <p:nvPr/>
+        </p:nvPicPr>
+        <p:blipFill>
+          <a:blip r:embed="rId11"/>
+          <a:stretch>
+            <a:fillRect/>
+          </a:stretch>
+        </p:blipFill>
+        <p:spPr>
+          <a:xfrm>
+            <a:off x="6553618" y="3475851"/>
+            <a:ext cx="4064209" cy="1759040"/>
+          </a:xfrm>
+          <a:prstGeom prst="rect">
+            <a:avLst/>
+          </a:prstGeom>
+        </p:spPr>
+      </p:pic>
     </p:spTree>
     <p:extLst>
       <p:ext uri="{BB962C8B-B14F-4D97-AF65-F5344CB8AC3E}">
@@ -7683,6 +7785,42 @@
           <a:xfrm rot="14808705">
             <a:off x="723606" y="3057510"/>
             <a:ext cx="1055797" cy="1055797"/>
+          </a:xfrm>
+          <a:prstGeom prst="rect">
+            <a:avLst/>
+          </a:prstGeom>
+        </p:spPr>
+      </p:pic>
+      <p:pic>
+        <p:nvPicPr>
+          <p:cNvPr id="4" name="Picture 3">
+            <a:extLst>
+              <a:ext uri="{FF2B5EF4-FFF2-40B4-BE49-F238E27FC236}">
+                <a16:creationId xmlns:a16="http://schemas.microsoft.com/office/drawing/2014/main" id="{E738D961-E528-3D7C-0EFD-0BABC8648825}"/>
+              </a:ext>
+            </a:extLst>
+          </p:cNvPr>
+          <p:cNvPicPr>
+            <a:picLocks noChangeAspect="1"/>
+          </p:cNvPicPr>
+          <p:nvPr/>
+        </p:nvPicPr>
+        <p:blipFill>
+          <a:blip r:embed="rId11">
+            <a:extLst>
+              <a:ext uri="{28A0092B-C50C-407E-A947-70E740481C1C}">
+                <a14:useLocalDpi xmlns:a14="http://schemas.microsoft.com/office/drawing/2010/main" val="0"/>
+              </a:ext>
+            </a:extLst>
+          </a:blip>
+          <a:stretch>
+            <a:fillRect/>
+          </a:stretch>
+        </p:blipFill>
+        <p:spPr>
+          <a:xfrm>
+            <a:off x="5987675" y="3325284"/>
+            <a:ext cx="3891493" cy="3362250"/>
           </a:xfrm>
           <a:prstGeom prst="rect">
             <a:avLst/>
@@ -8293,6 +8431,42 @@
           </a:prstGeom>
         </p:spPr>
       </p:pic>
+      <p:pic>
+        <p:nvPicPr>
+          <p:cNvPr id="6" name="Picture 5">
+            <a:extLst>
+              <a:ext uri="{FF2B5EF4-FFF2-40B4-BE49-F238E27FC236}">
+                <a16:creationId xmlns:a16="http://schemas.microsoft.com/office/drawing/2014/main" id="{1DFCF822-EE6C-2760-FCCD-8ED3DC47AD78}"/>
+              </a:ext>
+            </a:extLst>
+          </p:cNvPr>
+          <p:cNvPicPr>
+            <a:picLocks noChangeAspect="1"/>
+          </p:cNvPicPr>
+          <p:nvPr/>
+        </p:nvPicPr>
+        <p:blipFill>
+          <a:blip r:embed="rId11">
+            <a:extLst>
+              <a:ext uri="{28A0092B-C50C-407E-A947-70E740481C1C}">
+                <a14:useLocalDpi xmlns:a14="http://schemas.microsoft.com/office/drawing/2010/main" val="0"/>
+              </a:ext>
+            </a:extLst>
+          </a:blip>
+          <a:stretch>
+            <a:fillRect/>
+          </a:stretch>
+        </p:blipFill>
+        <p:spPr>
+          <a:xfrm>
+            <a:off x="6680792" y="3428999"/>
+            <a:ext cx="3004951" cy="3021282"/>
+          </a:xfrm>
+          <a:prstGeom prst="rect">
+            <a:avLst/>
+          </a:prstGeom>
+        </p:spPr>
+      </p:pic>
     </p:spTree>
     <p:extLst>
       <p:ext uri="{BB962C8B-B14F-4D97-AF65-F5344CB8AC3E}">
@@ -8990,6 +9164,42 @@
           <a:xfrm rot="18718640">
             <a:off x="182730" y="3365924"/>
             <a:ext cx="1055797" cy="1055797"/>
+          </a:xfrm>
+          <a:prstGeom prst="rect">
+            <a:avLst/>
+          </a:prstGeom>
+        </p:spPr>
+      </p:pic>
+      <p:pic>
+        <p:nvPicPr>
+          <p:cNvPr id="9" name="Picture 8">
+            <a:extLst>
+              <a:ext uri="{FF2B5EF4-FFF2-40B4-BE49-F238E27FC236}">
+                <a16:creationId xmlns:a16="http://schemas.microsoft.com/office/drawing/2014/main" id="{6E3C9909-EDDF-366A-1350-0349444136B2}"/>
+              </a:ext>
+            </a:extLst>
+          </p:cNvPr>
+          <p:cNvPicPr>
+            <a:picLocks noChangeAspect="1"/>
+          </p:cNvPicPr>
+          <p:nvPr/>
+        </p:nvPicPr>
+        <p:blipFill>
+          <a:blip r:embed="rId13">
+            <a:extLst>
+              <a:ext uri="{28A0092B-C50C-407E-A947-70E740481C1C}">
+                <a14:useLocalDpi xmlns:a14="http://schemas.microsoft.com/office/drawing/2010/main" val="0"/>
+              </a:ext>
+            </a:extLst>
+          </a:blip>
+          <a:stretch>
+            <a:fillRect/>
+          </a:stretch>
+        </p:blipFill>
+        <p:spPr>
+          <a:xfrm>
+            <a:off x="6555415" y="3852677"/>
+            <a:ext cx="3012313" cy="2783151"/>
           </a:xfrm>
           <a:prstGeom prst="rect">
             <a:avLst/>
@@ -9743,6 +9953,42 @@
           <a:xfrm rot="7984765">
             <a:off x="218243" y="2348338"/>
             <a:ext cx="1055797" cy="1055797"/>
+          </a:xfrm>
+          <a:prstGeom prst="rect">
+            <a:avLst/>
+          </a:prstGeom>
+        </p:spPr>
+      </p:pic>
+      <p:pic>
+        <p:nvPicPr>
+          <p:cNvPr id="4" name="Picture 3">
+            <a:extLst>
+              <a:ext uri="{FF2B5EF4-FFF2-40B4-BE49-F238E27FC236}">
+                <a16:creationId xmlns:a16="http://schemas.microsoft.com/office/drawing/2014/main" id="{E1F864F3-8083-067E-FA3B-BD197171FBAA}"/>
+              </a:ext>
+            </a:extLst>
+          </p:cNvPr>
+          <p:cNvPicPr>
+            <a:picLocks noChangeAspect="1"/>
+          </p:cNvPicPr>
+          <p:nvPr/>
+        </p:nvPicPr>
+        <p:blipFill>
+          <a:blip r:embed="rId7">
+            <a:extLst>
+              <a:ext uri="{28A0092B-C50C-407E-A947-70E740481C1C}">
+                <a14:useLocalDpi xmlns:a14="http://schemas.microsoft.com/office/drawing/2010/main" val="0"/>
+              </a:ext>
+            </a:extLst>
+          </a:blip>
+          <a:stretch>
+            <a:fillRect/>
+          </a:stretch>
+        </p:blipFill>
+        <p:spPr>
+          <a:xfrm>
+            <a:off x="7251704" y="3746170"/>
+            <a:ext cx="1830125" cy="3259365"/>
           </a:xfrm>
           <a:prstGeom prst="rect">
             <a:avLst/>
@@ -14366,7 +14612,7 @@
                 <a:latin typeface="Times New Roman" panose="02020603050405020304" pitchFamily="18" charset="0"/>
                 <a:cs typeface="Times New Roman" panose="02020603050405020304" pitchFamily="18" charset="0"/>
               </a:rPr>
-              <a:t>Demo Screenshot: Home Page</a:t>
+              <a:t>Home Page</a:t>
             </a:r>
           </a:p>
         </p:txBody>
@@ -14818,6 +15064,42 @@
           <a:xfrm rot="12480190">
             <a:off x="648093" y="2607484"/>
             <a:ext cx="1055797" cy="1055797"/>
+          </a:xfrm>
+          <a:prstGeom prst="rect">
+            <a:avLst/>
+          </a:prstGeom>
+        </p:spPr>
+      </p:pic>
+      <p:pic>
+        <p:nvPicPr>
+          <p:cNvPr id="4" name="Picture 3">
+            <a:extLst>
+              <a:ext uri="{FF2B5EF4-FFF2-40B4-BE49-F238E27FC236}">
+                <a16:creationId xmlns:a16="http://schemas.microsoft.com/office/drawing/2014/main" id="{B132F02F-62AA-F3F8-E1DB-EF75613F705A}"/>
+              </a:ext>
+            </a:extLst>
+          </p:cNvPr>
+          <p:cNvPicPr>
+            <a:picLocks noChangeAspect="1"/>
+          </p:cNvPicPr>
+          <p:nvPr/>
+        </p:nvPicPr>
+        <p:blipFill>
+          <a:blip r:embed="rId11">
+            <a:extLst>
+              <a:ext uri="{28A0092B-C50C-407E-A947-70E740481C1C}">
+                <a14:useLocalDpi xmlns:a14="http://schemas.microsoft.com/office/drawing/2010/main" val="0"/>
+              </a:ext>
+            </a:extLst>
+          </a:blip>
+          <a:stretch>
+            <a:fillRect/>
+          </a:stretch>
+        </p:blipFill>
+        <p:spPr>
+          <a:xfrm>
+            <a:off x="5547552" y="3548310"/>
+            <a:ext cx="5469411" cy="2577438"/>
           </a:xfrm>
           <a:prstGeom prst="rect">
             <a:avLst/>
@@ -15125,7 +15407,7 @@
         </p:nvSpPr>
         <p:spPr>
           <a:xfrm>
-            <a:off x="4687218" y="1216953"/>
+            <a:off x="4150537" y="1216951"/>
             <a:ext cx="7747000" cy="584775"/>
           </a:xfrm>
           <a:prstGeom prst="rect">
@@ -15139,13 +15421,13 @@
           </a:bodyPr>
           <a:lstStyle/>
           <a:p>
-            <a:pPr algn="just"/>
+            <a:pPr algn="ctr"/>
             <a:r>
               <a:rPr lang="en-US" sz="3200" b="1" dirty="0">
                 <a:latin typeface="Times New Roman" panose="02020603050405020304" pitchFamily="18" charset="0"/>
                 <a:cs typeface="Times New Roman" panose="02020603050405020304" pitchFamily="18" charset="0"/>
               </a:rPr>
-              <a:t>Demo Screenshot: Product / Brand Page</a:t>
+              <a:t>Product / Brand Page</a:t>
             </a:r>
           </a:p>
         </p:txBody>
@@ -15572,6 +15854,114 @@
           <a:xfrm rot="14468361">
             <a:off x="726677" y="2856734"/>
             <a:ext cx="1055797" cy="1055797"/>
+          </a:xfrm>
+          <a:prstGeom prst="rect">
+            <a:avLst/>
+          </a:prstGeom>
+        </p:spPr>
+      </p:pic>
+      <p:pic>
+        <p:nvPicPr>
+          <p:cNvPr id="4" name="Picture 3">
+            <a:extLst>
+              <a:ext uri="{FF2B5EF4-FFF2-40B4-BE49-F238E27FC236}">
+                <a16:creationId xmlns:a16="http://schemas.microsoft.com/office/drawing/2014/main" id="{9580C867-16F6-060D-DAF6-4014B8C2CE29}"/>
+              </a:ext>
+            </a:extLst>
+          </p:cNvPr>
+          <p:cNvPicPr>
+            <a:picLocks noChangeAspect="1"/>
+          </p:cNvPicPr>
+          <p:nvPr/>
+        </p:nvPicPr>
+        <p:blipFill>
+          <a:blip r:embed="rId11">
+            <a:extLst>
+              <a:ext uri="{28A0092B-C50C-407E-A947-70E740481C1C}">
+                <a14:useLocalDpi xmlns:a14="http://schemas.microsoft.com/office/drawing/2010/main" val="0"/>
+              </a:ext>
+            </a:extLst>
+          </a:blip>
+          <a:stretch>
+            <a:fillRect/>
+          </a:stretch>
+        </p:blipFill>
+        <p:spPr>
+          <a:xfrm>
+            <a:off x="4311401" y="3194920"/>
+            <a:ext cx="3785597" cy="1797405"/>
+          </a:xfrm>
+          <a:prstGeom prst="rect">
+            <a:avLst/>
+          </a:prstGeom>
+        </p:spPr>
+      </p:pic>
+      <p:pic>
+        <p:nvPicPr>
+          <p:cNvPr id="10" name="Picture 9">
+            <a:extLst>
+              <a:ext uri="{FF2B5EF4-FFF2-40B4-BE49-F238E27FC236}">
+                <a16:creationId xmlns:a16="http://schemas.microsoft.com/office/drawing/2014/main" id="{FD5DFA1B-1418-8CF2-991C-6787F17B4346}"/>
+              </a:ext>
+            </a:extLst>
+          </p:cNvPr>
+          <p:cNvPicPr>
+            <a:picLocks noChangeAspect="1"/>
+          </p:cNvPicPr>
+          <p:nvPr/>
+        </p:nvPicPr>
+        <p:blipFill>
+          <a:blip r:embed="rId12">
+            <a:extLst>
+              <a:ext uri="{28A0092B-C50C-407E-A947-70E740481C1C}">
+                <a14:useLocalDpi xmlns:a14="http://schemas.microsoft.com/office/drawing/2010/main" val="0"/>
+              </a:ext>
+            </a:extLst>
+          </a:blip>
+          <a:stretch>
+            <a:fillRect/>
+          </a:stretch>
+        </p:blipFill>
+        <p:spPr>
+          <a:xfrm>
+            <a:off x="6369922" y="5087484"/>
+            <a:ext cx="3454151" cy="1618392"/>
+          </a:xfrm>
+          <a:prstGeom prst="rect">
+            <a:avLst/>
+          </a:prstGeom>
+        </p:spPr>
+      </p:pic>
+      <p:pic>
+        <p:nvPicPr>
+          <p:cNvPr id="12" name="Picture 11">
+            <a:extLst>
+              <a:ext uri="{FF2B5EF4-FFF2-40B4-BE49-F238E27FC236}">
+                <a16:creationId xmlns:a16="http://schemas.microsoft.com/office/drawing/2014/main" id="{200359B3-8765-EC92-4751-E7E1FAA7F5E0}"/>
+              </a:ext>
+            </a:extLst>
+          </p:cNvPr>
+          <p:cNvPicPr>
+            <a:picLocks noChangeAspect="1"/>
+          </p:cNvPicPr>
+          <p:nvPr/>
+        </p:nvPicPr>
+        <p:blipFill>
+          <a:blip r:embed="rId13">
+            <a:extLst>
+              <a:ext uri="{28A0092B-C50C-407E-A947-70E740481C1C}">
+                <a14:useLocalDpi xmlns:a14="http://schemas.microsoft.com/office/drawing/2010/main" val="0"/>
+              </a:ext>
+            </a:extLst>
+          </a:blip>
+          <a:stretch>
+            <a:fillRect/>
+          </a:stretch>
+        </p:blipFill>
+        <p:spPr>
+          <a:xfrm>
+            <a:off x="8395651" y="3150172"/>
+            <a:ext cx="3785597" cy="1816605"/>
           </a:xfrm>
           <a:prstGeom prst="rect">
             <a:avLst/>
@@ -15899,7 +16289,7 @@
                 <a:latin typeface="Times New Roman" panose="02020603050405020304" pitchFamily="18" charset="0"/>
                 <a:cs typeface="Times New Roman" panose="02020603050405020304" pitchFamily="18" charset="0"/>
               </a:rPr>
-              <a:t>Demo Screenshot: Contact / Booking Page</a:t>
+              <a:t>Contact / Booking Page</a:t>
             </a:r>
             <a:r>
               <a:rPr lang="en-US" b="1" dirty="0">
@@ -16186,6 +16576,42 @@
           <a:xfrm rot="15781008">
             <a:off x="640212" y="3219096"/>
             <a:ext cx="1055797" cy="1055797"/>
+          </a:xfrm>
+          <a:prstGeom prst="rect">
+            <a:avLst/>
+          </a:prstGeom>
+        </p:spPr>
+      </p:pic>
+      <p:pic>
+        <p:nvPicPr>
+          <p:cNvPr id="4" name="Picture 3">
+            <a:extLst>
+              <a:ext uri="{FF2B5EF4-FFF2-40B4-BE49-F238E27FC236}">
+                <a16:creationId xmlns:a16="http://schemas.microsoft.com/office/drawing/2014/main" id="{DB4D19F1-95DB-6D2C-C343-1230E5F8DB3E}"/>
+              </a:ext>
+            </a:extLst>
+          </p:cNvPr>
+          <p:cNvPicPr>
+            <a:picLocks noChangeAspect="1"/>
+          </p:cNvPicPr>
+          <p:nvPr/>
+        </p:nvPicPr>
+        <p:blipFill>
+          <a:blip r:embed="rId11">
+            <a:extLst>
+              <a:ext uri="{28A0092B-C50C-407E-A947-70E740481C1C}">
+                <a14:useLocalDpi xmlns:a14="http://schemas.microsoft.com/office/drawing/2010/main" val="0"/>
+              </a:ext>
+            </a:extLst>
+          </a:blip>
+          <a:stretch>
+            <a:fillRect/>
+          </a:stretch>
+        </p:blipFill>
+        <p:spPr>
+          <a:xfrm>
+            <a:off x="5444418" y="3423772"/>
+            <a:ext cx="6212641" cy="2883269"/>
           </a:xfrm>
           <a:prstGeom prst="rect">
             <a:avLst/>
@@ -16493,7 +16919,7 @@
         </p:nvSpPr>
         <p:spPr>
           <a:xfrm>
-            <a:off x="3957874" y="1365855"/>
+            <a:off x="3957874" y="737205"/>
             <a:ext cx="8234126" cy="584775"/>
           </a:xfrm>
           <a:prstGeom prst="rect">
@@ -16534,7 +16960,7 @@
         </p:nvSpPr>
         <p:spPr bwMode="auto">
           <a:xfrm>
-            <a:off x="5415693" y="1853991"/>
+            <a:off x="5415693" y="1225341"/>
             <a:ext cx="4764446" cy="2246769"/>
           </a:xfrm>
           <a:prstGeom prst="rect">
@@ -17089,6 +17515,42 @@
           <a:xfrm rot="18721281">
             <a:off x="403665" y="3414210"/>
             <a:ext cx="1055797" cy="1055797"/>
+          </a:xfrm>
+          <a:prstGeom prst="rect">
+            <a:avLst/>
+          </a:prstGeom>
+        </p:spPr>
+      </p:pic>
+      <p:pic>
+        <p:nvPicPr>
+          <p:cNvPr id="4" name="Picture 3">
+            <a:extLst>
+              <a:ext uri="{FF2B5EF4-FFF2-40B4-BE49-F238E27FC236}">
+                <a16:creationId xmlns:a16="http://schemas.microsoft.com/office/drawing/2014/main" id="{264B75D3-D570-E0C4-BFB3-0C18FACF535F}"/>
+              </a:ext>
+            </a:extLst>
+          </p:cNvPr>
+          <p:cNvPicPr>
+            <a:picLocks noChangeAspect="1"/>
+          </p:cNvPicPr>
+          <p:nvPr/>
+        </p:nvPicPr>
+        <p:blipFill>
+          <a:blip r:embed="rId11">
+            <a:extLst>
+              <a:ext uri="{28A0092B-C50C-407E-A947-70E740481C1C}">
+                <a14:useLocalDpi xmlns:a14="http://schemas.microsoft.com/office/drawing/2010/main" val="0"/>
+              </a:ext>
+            </a:extLst>
+          </a:blip>
+          <a:stretch>
+            <a:fillRect/>
+          </a:stretch>
+        </p:blipFill>
+        <p:spPr>
+          <a:xfrm>
+            <a:off x="7090979" y="3586390"/>
+            <a:ext cx="2182455" cy="3183630"/>
           </a:xfrm>
           <a:prstGeom prst="rect">
             <a:avLst/>

--- a/FINALAICTPRROJECT.ppt.pptx
+++ b/FINALAICTPRROJECT.ppt.pptx
@@ -132,6 +132,1871 @@
 </p:presentation>
 </file>
 
+<file path=ppt/charts/chart1.xml><?xml version="1.0" encoding="utf-8"?>
+<c:chartSpace xmlns:c="http://schemas.openxmlformats.org/drawingml/2006/chart" xmlns:a="http://schemas.openxmlformats.org/drawingml/2006/main" xmlns:r="http://schemas.openxmlformats.org/officeDocument/2006/relationships" xmlns:c16r2="http://schemas.microsoft.com/office/drawing/2015/06/chart">
+  <c:date1904 val="0"/>
+  <c:lang val="en-US"/>
+  <c:roundedCorners val="0"/>
+  <mc:AlternateContent xmlns:mc="http://schemas.openxmlformats.org/markup-compatibility/2006">
+    <mc:Choice xmlns:c14="http://schemas.microsoft.com/office/drawing/2007/8/2/chart" Requires="c14">
+      <c14:style val="102"/>
+    </mc:Choice>
+    <mc:Fallback>
+      <c:style val="2"/>
+    </mc:Fallback>
+  </mc:AlternateContent>
+  <c:chart>
+    <c:title>
+      <c:tx>
+        <c:rich>
+          <a:bodyPr rot="0" spcFirstLastPara="1" vertOverflow="ellipsis" vert="horz" wrap="square" anchor="ctr" anchorCtr="1"/>
+          <a:lstStyle/>
+          <a:p>
+            <a:pPr>
+              <a:defRPr sz="1600" b="1" i="0" u="none" strike="noStrike" kern="1200" spc="100" baseline="0">
+                <a:solidFill>
+                  <a:schemeClr val="lt1">
+                    <a:lumMod val="95000"/>
+                  </a:schemeClr>
+                </a:solidFill>
+                <a:effectLst>
+                  <a:outerShdw blurRad="50800" dist="38100" dir="5400000" algn="t" rotWithShape="0">
+                    <a:prstClr val="black">
+                      <a:alpha val="40000"/>
+                    </a:prstClr>
+                  </a:outerShdw>
+                </a:effectLst>
+                <a:latin typeface="+mn-lt"/>
+                <a:ea typeface="+mn-ea"/>
+                <a:cs typeface="+mn-cs"/>
+              </a:defRPr>
+            </a:pPr>
+            <a:r>
+              <a:rPr lang="en-GB" sz="1600" b="1" i="0" u="none" strike="noStrike" baseline="0">
+                <a:effectLst>
+                  <a:outerShdw blurRad="50800" dist="38100" dir="5400000" algn="t" rotWithShape="0">
+                    <a:prstClr val="black">
+                      <a:alpha val="40000"/>
+                    </a:prstClr>
+                  </a:outerShdw>
+                </a:effectLst>
+                <a:latin typeface="Times New Roman" panose="02020603050405020304" pitchFamily="18" charset="0"/>
+                <a:cs typeface="Times New Roman" panose="02020603050405020304" pitchFamily="18" charset="0"/>
+              </a:rPr>
+              <a:t>Total Monthly Income by Brand</a:t>
+            </a:r>
+            <a:endParaRPr lang="en-US">
+              <a:latin typeface="Times New Roman" panose="02020603050405020304" pitchFamily="18" charset="0"/>
+              <a:cs typeface="Times New Roman" panose="02020603050405020304" pitchFamily="18" charset="0"/>
+            </a:endParaRPr>
+          </a:p>
+        </c:rich>
+      </c:tx>
+      <c:overlay val="0"/>
+      <c:spPr>
+        <a:noFill/>
+        <a:ln>
+          <a:noFill/>
+        </a:ln>
+        <a:effectLst/>
+      </c:spPr>
+      <c:txPr>
+        <a:bodyPr rot="0" spcFirstLastPara="1" vertOverflow="ellipsis" vert="horz" wrap="square" anchor="ctr" anchorCtr="1"/>
+        <a:lstStyle/>
+        <a:p>
+          <a:pPr>
+            <a:defRPr sz="1600" b="1" i="0" u="none" strike="noStrike" kern="1200" spc="100" baseline="0">
+              <a:solidFill>
+                <a:schemeClr val="lt1">
+                  <a:lumMod val="95000"/>
+                </a:schemeClr>
+              </a:solidFill>
+              <a:effectLst>
+                <a:outerShdw blurRad="50800" dist="38100" dir="5400000" algn="t" rotWithShape="0">
+                  <a:prstClr val="black">
+                    <a:alpha val="40000"/>
+                  </a:prstClr>
+                </a:outerShdw>
+              </a:effectLst>
+              <a:latin typeface="+mn-lt"/>
+              <a:ea typeface="+mn-ea"/>
+              <a:cs typeface="+mn-cs"/>
+            </a:defRPr>
+          </a:pPr>
+          <a:endParaRPr lang="en-US"/>
+        </a:p>
+      </c:txPr>
+    </c:title>
+    <c:autoTitleDeleted val="0"/>
+    <c:view3D>
+      <c:rotX val="15"/>
+      <c:rotY val="20"/>
+      <c:depthPercent val="100"/>
+      <c:rAngAx val="1"/>
+    </c:view3D>
+    <c:floor>
+      <c:thickness val="0"/>
+      <c:spPr>
+        <a:noFill/>
+        <a:ln>
+          <a:noFill/>
+        </a:ln>
+        <a:effectLst/>
+        <a:sp3d/>
+      </c:spPr>
+    </c:floor>
+    <c:sideWall>
+      <c:thickness val="0"/>
+      <c:spPr>
+        <a:noFill/>
+        <a:ln>
+          <a:noFill/>
+        </a:ln>
+        <a:effectLst/>
+        <a:sp3d/>
+      </c:spPr>
+    </c:sideWall>
+    <c:backWall>
+      <c:thickness val="0"/>
+      <c:spPr>
+        <a:noFill/>
+        <a:ln>
+          <a:noFill/>
+        </a:ln>
+        <a:effectLst/>
+        <a:sp3d/>
+      </c:spPr>
+    </c:backWall>
+    <c:plotArea>
+      <c:layout/>
+      <c:bar3DChart>
+        <c:barDir val="col"/>
+        <c:grouping val="stacked"/>
+        <c:varyColors val="0"/>
+        <c:ser>
+          <c:idx val="0"/>
+          <c:order val="0"/>
+          <c:tx>
+            <c:strRef>
+              <c:f>'Summary Dashboard'!$B$1</c:f>
+              <c:strCache>
+                <c:ptCount val="1"/>
+                <c:pt idx="0">
+                  <c:v>Total Monthly Income</c:v>
+                </c:pt>
+              </c:strCache>
+            </c:strRef>
+          </c:tx>
+          <c:spPr>
+            <a:gradFill rotWithShape="1">
+              <a:gsLst>
+                <a:gs pos="0">
+                  <a:schemeClr val="accent1">
+                    <a:satMod val="103000"/>
+                    <a:lumMod val="102000"/>
+                    <a:tint val="94000"/>
+                  </a:schemeClr>
+                </a:gs>
+                <a:gs pos="50000">
+                  <a:schemeClr val="accent1">
+                    <a:satMod val="110000"/>
+                    <a:lumMod val="100000"/>
+                    <a:shade val="100000"/>
+                  </a:schemeClr>
+                </a:gs>
+                <a:gs pos="100000">
+                  <a:schemeClr val="accent1">
+                    <a:lumMod val="99000"/>
+                    <a:satMod val="120000"/>
+                    <a:shade val="78000"/>
+                  </a:schemeClr>
+                </a:gs>
+              </a:gsLst>
+              <a:lin ang="5400000" scaled="0"/>
+            </a:gradFill>
+            <a:ln>
+              <a:noFill/>
+            </a:ln>
+            <a:effectLst>
+              <a:outerShdw blurRad="57150" dist="19050" dir="5400000" algn="ctr" rotWithShape="0">
+                <a:srgbClr val="000000">
+                  <a:alpha val="63000"/>
+                </a:srgbClr>
+              </a:outerShdw>
+            </a:effectLst>
+            <a:sp3d/>
+          </c:spPr>
+          <c:invertIfNegative val="0"/>
+          <c:cat>
+            <c:strRef>
+              <c:f>'Summary Dashboard'!$A$2:$A$7</c:f>
+              <c:strCache>
+                <c:ptCount val="6"/>
+                <c:pt idx="0">
+                  <c:v>Toyata </c:v>
+                </c:pt>
+                <c:pt idx="1">
+                  <c:v>Hyundai</c:v>
+                </c:pt>
+                <c:pt idx="2">
+                  <c:v>Suzuki</c:v>
+                </c:pt>
+                <c:pt idx="3">
+                  <c:v>Bmw</c:v>
+                </c:pt>
+                <c:pt idx="4">
+                  <c:v>Audi</c:v>
+                </c:pt>
+                <c:pt idx="5">
+                  <c:v>Honda</c:v>
+                </c:pt>
+              </c:strCache>
+            </c:strRef>
+          </c:cat>
+          <c:val>
+            <c:numRef>
+              <c:f>'Summary Dashboard'!$B$2:$B$7</c:f>
+              <c:numCache>
+                <c:formatCode>General</c:formatCode>
+                <c:ptCount val="6"/>
+                <c:pt idx="0">
+                  <c:v>1634000</c:v>
+                </c:pt>
+                <c:pt idx="1">
+                  <c:v>813000</c:v>
+                </c:pt>
+                <c:pt idx="2">
+                  <c:v>328500</c:v>
+                </c:pt>
+                <c:pt idx="3">
+                  <c:v>1635000</c:v>
+                </c:pt>
+                <c:pt idx="4">
+                  <c:v>1465000</c:v>
+                </c:pt>
+                <c:pt idx="5">
+                  <c:v>346000</c:v>
+                </c:pt>
+              </c:numCache>
+            </c:numRef>
+          </c:val>
+          <c:extLst>
+            <c:ext xmlns:c16="http://schemas.microsoft.com/office/drawing/2014/chart" uri="{C3380CC4-5D6E-409C-BE32-E72D297353CC}">
+              <c16:uniqueId val="{00000000-E73D-4D81-AE6D-E516C922A9A4}"/>
+            </c:ext>
+          </c:extLst>
+        </c:ser>
+        <c:dLbls>
+          <c:showLegendKey val="0"/>
+          <c:showVal val="0"/>
+          <c:showCatName val="0"/>
+          <c:showSerName val="0"/>
+          <c:showPercent val="0"/>
+          <c:showBubbleSize val="0"/>
+        </c:dLbls>
+        <c:gapWidth val="150"/>
+        <c:shape val="box"/>
+        <c:axId val="1550046735"/>
+        <c:axId val="1550071215"/>
+        <c:axId val="0"/>
+      </c:bar3DChart>
+      <c:catAx>
+        <c:axId val="1550046735"/>
+        <c:scaling>
+          <c:orientation val="minMax"/>
+        </c:scaling>
+        <c:delete val="0"/>
+        <c:axPos val="b"/>
+        <c:numFmt formatCode="General" sourceLinked="1"/>
+        <c:majorTickMark val="none"/>
+        <c:minorTickMark val="none"/>
+        <c:tickLblPos val="nextTo"/>
+        <c:spPr>
+          <a:noFill/>
+          <a:ln>
+            <a:noFill/>
+          </a:ln>
+          <a:effectLst/>
+        </c:spPr>
+        <c:txPr>
+          <a:bodyPr rot="-60000000" spcFirstLastPara="1" vertOverflow="ellipsis" vert="horz" wrap="square" anchor="ctr" anchorCtr="1"/>
+          <a:lstStyle/>
+          <a:p>
+            <a:pPr>
+              <a:defRPr sz="900" b="0" i="0" u="none" strike="noStrike" kern="1200" baseline="0">
+                <a:solidFill>
+                  <a:schemeClr val="lt1">
+                    <a:lumMod val="85000"/>
+                  </a:schemeClr>
+                </a:solidFill>
+                <a:latin typeface="Times New Roman" panose="02020603050405020304" pitchFamily="18" charset="0"/>
+                <a:ea typeface="+mn-ea"/>
+                <a:cs typeface="Times New Roman" panose="02020603050405020304" pitchFamily="18" charset="0"/>
+              </a:defRPr>
+            </a:pPr>
+            <a:endParaRPr lang="en-US"/>
+          </a:p>
+        </c:txPr>
+        <c:crossAx val="1550071215"/>
+        <c:crosses val="autoZero"/>
+        <c:auto val="1"/>
+        <c:lblAlgn val="ctr"/>
+        <c:lblOffset val="100"/>
+        <c:noMultiLvlLbl val="0"/>
+      </c:catAx>
+      <c:valAx>
+        <c:axId val="1550071215"/>
+        <c:scaling>
+          <c:orientation val="minMax"/>
+        </c:scaling>
+        <c:delete val="0"/>
+        <c:axPos val="l"/>
+        <c:majorGridlines>
+          <c:spPr>
+            <a:ln w="9525" cap="flat" cmpd="sng" algn="ctr">
+              <a:solidFill>
+                <a:schemeClr val="dk1">
+                  <a:lumMod val="50000"/>
+                  <a:lumOff val="50000"/>
+                </a:schemeClr>
+              </a:solidFill>
+              <a:round/>
+            </a:ln>
+            <a:effectLst/>
+          </c:spPr>
+        </c:majorGridlines>
+        <c:numFmt formatCode="General" sourceLinked="1"/>
+        <c:majorTickMark val="none"/>
+        <c:minorTickMark val="none"/>
+        <c:tickLblPos val="nextTo"/>
+        <c:spPr>
+          <a:noFill/>
+          <a:ln>
+            <a:noFill/>
+          </a:ln>
+          <a:effectLst/>
+        </c:spPr>
+        <c:txPr>
+          <a:bodyPr rot="-60000000" spcFirstLastPara="1" vertOverflow="ellipsis" vert="horz" wrap="square" anchor="ctr" anchorCtr="1"/>
+          <a:lstStyle/>
+          <a:p>
+            <a:pPr>
+              <a:defRPr sz="900" b="0" i="0" u="none" strike="noStrike" kern="1200" baseline="0">
+                <a:solidFill>
+                  <a:schemeClr val="lt1">
+                    <a:lumMod val="85000"/>
+                  </a:schemeClr>
+                </a:solidFill>
+                <a:latin typeface="Times New Roman" panose="02020603050405020304" pitchFamily="18" charset="0"/>
+                <a:ea typeface="+mn-ea"/>
+                <a:cs typeface="Times New Roman" panose="02020603050405020304" pitchFamily="18" charset="0"/>
+              </a:defRPr>
+            </a:pPr>
+            <a:endParaRPr lang="en-US"/>
+          </a:p>
+        </c:txPr>
+        <c:crossAx val="1550046735"/>
+        <c:crosses val="autoZero"/>
+        <c:crossBetween val="between"/>
+      </c:valAx>
+      <c:spPr>
+        <a:noFill/>
+        <a:ln>
+          <a:noFill/>
+        </a:ln>
+        <a:effectLst/>
+      </c:spPr>
+    </c:plotArea>
+    <c:plotVisOnly val="1"/>
+    <c:dispBlanksAs val="gap"/>
+    <c:showDLblsOverMax val="0"/>
+    <c:extLst>
+      <c:ext xmlns:c16r3="http://schemas.microsoft.com/office/drawing/2017/03/chart" uri="{56B9EC1D-385E-4148-901F-78D8002777C0}">
+        <c16r3:dataDisplayOptions16>
+          <c16r3:dispNaAsBlank val="1"/>
+        </c16r3:dataDisplayOptions16>
+      </c:ext>
+    </c:extLst>
+  </c:chart>
+  <c:spPr>
+    <a:gradFill flip="none" rotWithShape="1">
+      <a:gsLst>
+        <a:gs pos="0">
+          <a:schemeClr val="dk1">
+            <a:lumMod val="65000"/>
+            <a:lumOff val="35000"/>
+          </a:schemeClr>
+        </a:gs>
+        <a:gs pos="100000">
+          <a:schemeClr val="dk1">
+            <a:lumMod val="85000"/>
+            <a:lumOff val="15000"/>
+          </a:schemeClr>
+        </a:gs>
+      </a:gsLst>
+      <a:path path="circle">
+        <a:fillToRect l="50000" t="50000" r="50000" b="50000"/>
+      </a:path>
+      <a:tileRect/>
+    </a:gradFill>
+    <a:ln>
+      <a:noFill/>
+    </a:ln>
+    <a:effectLst/>
+  </c:spPr>
+  <c:txPr>
+    <a:bodyPr/>
+    <a:lstStyle/>
+    <a:p>
+      <a:pPr>
+        <a:defRPr/>
+      </a:pPr>
+      <a:endParaRPr lang="en-US"/>
+    </a:p>
+  </c:txPr>
+  <c:externalData r:id="rId3">
+    <c:autoUpdate val="0"/>
+  </c:externalData>
+</c:chartSpace>
+</file>
+
+<file path=ppt/charts/chart2.xml><?xml version="1.0" encoding="utf-8"?>
+<c:chartSpace xmlns:c="http://schemas.openxmlformats.org/drawingml/2006/chart" xmlns:a="http://schemas.openxmlformats.org/drawingml/2006/main" xmlns:r="http://schemas.openxmlformats.org/officeDocument/2006/relationships" xmlns:c16r2="http://schemas.microsoft.com/office/drawing/2015/06/chart">
+  <c:date1904 val="0"/>
+  <c:lang val="en-US"/>
+  <c:roundedCorners val="0"/>
+  <mc:AlternateContent xmlns:mc="http://schemas.openxmlformats.org/markup-compatibility/2006">
+    <mc:Choice xmlns:c14="http://schemas.microsoft.com/office/drawing/2007/8/2/chart" Requires="c14">
+      <c14:style val="102"/>
+    </mc:Choice>
+    <mc:Fallback>
+      <c:style val="2"/>
+    </mc:Fallback>
+  </mc:AlternateContent>
+  <c:chart>
+    <c:title>
+      <c:tx>
+        <c:rich>
+          <a:bodyPr rot="0" spcFirstLastPara="1" vertOverflow="ellipsis" vert="horz" wrap="square" anchor="ctr" anchorCtr="1"/>
+          <a:lstStyle/>
+          <a:p>
+            <a:pPr>
+              <a:defRPr sz="1600" b="1" i="0" u="none" strike="noStrike" kern="1200" spc="100" baseline="0">
+                <a:solidFill>
+                  <a:schemeClr val="lt1">
+                    <a:lumMod val="95000"/>
+                  </a:schemeClr>
+                </a:solidFill>
+                <a:effectLst>
+                  <a:outerShdw blurRad="50800" dist="38100" dir="5400000" algn="t" rotWithShape="0">
+                    <a:prstClr val="black">
+                      <a:alpha val="40000"/>
+                    </a:prstClr>
+                  </a:outerShdw>
+                </a:effectLst>
+                <a:latin typeface="Times New Roman" panose="02020603050405020304" pitchFamily="18" charset="0"/>
+                <a:ea typeface="+mn-ea"/>
+                <a:cs typeface="Times New Roman" panose="02020603050405020304" pitchFamily="18" charset="0"/>
+              </a:defRPr>
+            </a:pPr>
+            <a:r>
+              <a:rPr lang="en-GB" sz="1600" b="1" i="0" u="none" strike="noStrike" baseline="0">
+                <a:effectLst>
+                  <a:outerShdw blurRad="50800" dist="38100" dir="5400000" algn="t" rotWithShape="0">
+                    <a:prstClr val="black">
+                      <a:alpha val="40000"/>
+                    </a:prstClr>
+                  </a:outerShdw>
+                </a:effectLst>
+                <a:latin typeface="Times New Roman" panose="02020603050405020304" pitchFamily="18" charset="0"/>
+                <a:cs typeface="Times New Roman" panose="02020603050405020304" pitchFamily="18" charset="0"/>
+              </a:rPr>
+              <a:t>Cars per Category</a:t>
+            </a:r>
+            <a:endParaRPr lang="en-US">
+              <a:latin typeface="Times New Roman" panose="02020603050405020304" pitchFamily="18" charset="0"/>
+              <a:cs typeface="Times New Roman" panose="02020603050405020304" pitchFamily="18" charset="0"/>
+            </a:endParaRPr>
+          </a:p>
+        </c:rich>
+      </c:tx>
+      <c:overlay val="0"/>
+      <c:spPr>
+        <a:noFill/>
+        <a:ln>
+          <a:noFill/>
+        </a:ln>
+        <a:effectLst/>
+      </c:spPr>
+      <c:txPr>
+        <a:bodyPr rot="0" spcFirstLastPara="1" vertOverflow="ellipsis" vert="horz" wrap="square" anchor="ctr" anchorCtr="1"/>
+        <a:lstStyle/>
+        <a:p>
+          <a:pPr>
+            <a:defRPr sz="1600" b="1" i="0" u="none" strike="noStrike" kern="1200" spc="100" baseline="0">
+              <a:solidFill>
+                <a:schemeClr val="lt1">
+                  <a:lumMod val="95000"/>
+                </a:schemeClr>
+              </a:solidFill>
+              <a:effectLst>
+                <a:outerShdw blurRad="50800" dist="38100" dir="5400000" algn="t" rotWithShape="0">
+                  <a:prstClr val="black">
+                    <a:alpha val="40000"/>
+                  </a:prstClr>
+                </a:outerShdw>
+              </a:effectLst>
+              <a:latin typeface="Times New Roman" panose="02020603050405020304" pitchFamily="18" charset="0"/>
+              <a:ea typeface="+mn-ea"/>
+              <a:cs typeface="Times New Roman" panose="02020603050405020304" pitchFamily="18" charset="0"/>
+            </a:defRPr>
+          </a:pPr>
+          <a:endParaRPr lang="en-US"/>
+        </a:p>
+      </c:txPr>
+    </c:title>
+    <c:autoTitleDeleted val="0"/>
+    <c:view3D>
+      <c:rotX val="30"/>
+      <c:rotY val="0"/>
+      <c:depthPercent val="100"/>
+      <c:rAngAx val="0"/>
+    </c:view3D>
+    <c:floor>
+      <c:thickness val="0"/>
+      <c:spPr>
+        <a:noFill/>
+        <a:ln>
+          <a:noFill/>
+        </a:ln>
+        <a:effectLst/>
+        <a:sp3d/>
+      </c:spPr>
+    </c:floor>
+    <c:sideWall>
+      <c:thickness val="0"/>
+      <c:spPr>
+        <a:noFill/>
+        <a:ln>
+          <a:noFill/>
+        </a:ln>
+        <a:effectLst/>
+        <a:sp3d/>
+      </c:spPr>
+    </c:sideWall>
+    <c:backWall>
+      <c:thickness val="0"/>
+      <c:spPr>
+        <a:noFill/>
+        <a:ln>
+          <a:noFill/>
+        </a:ln>
+        <a:effectLst/>
+        <a:sp3d/>
+      </c:spPr>
+    </c:backWall>
+    <c:plotArea>
+      <c:layout/>
+      <c:pie3DChart>
+        <c:varyColors val="1"/>
+        <c:ser>
+          <c:idx val="0"/>
+          <c:order val="0"/>
+          <c:tx>
+            <c:strRef>
+              <c:f>'Summary Dashboard'!$E$2</c:f>
+              <c:strCache>
+                <c:ptCount val="1"/>
+                <c:pt idx="0">
+                  <c:v>Total cars</c:v>
+                </c:pt>
+              </c:strCache>
+            </c:strRef>
+          </c:tx>
+          <c:dPt>
+            <c:idx val="0"/>
+            <c:bubble3D val="0"/>
+            <c:spPr>
+              <a:gradFill rotWithShape="1">
+                <a:gsLst>
+                  <a:gs pos="0">
+                    <a:schemeClr val="accent1">
+                      <a:satMod val="103000"/>
+                      <a:lumMod val="102000"/>
+                      <a:tint val="94000"/>
+                    </a:schemeClr>
+                  </a:gs>
+                  <a:gs pos="50000">
+                    <a:schemeClr val="accent1">
+                      <a:satMod val="110000"/>
+                      <a:lumMod val="100000"/>
+                      <a:shade val="100000"/>
+                    </a:schemeClr>
+                  </a:gs>
+                  <a:gs pos="100000">
+                    <a:schemeClr val="accent1">
+                      <a:lumMod val="99000"/>
+                      <a:satMod val="120000"/>
+                      <a:shade val="78000"/>
+                    </a:schemeClr>
+                  </a:gs>
+                </a:gsLst>
+                <a:lin ang="5400000" scaled="0"/>
+              </a:gradFill>
+              <a:ln>
+                <a:noFill/>
+              </a:ln>
+              <a:effectLst>
+                <a:outerShdw blurRad="57150" dist="19050" dir="5400000" algn="ctr" rotWithShape="0">
+                  <a:srgbClr val="000000">
+                    <a:alpha val="63000"/>
+                  </a:srgbClr>
+                </a:outerShdw>
+              </a:effectLst>
+              <a:sp3d/>
+            </c:spPr>
+            <c:extLst>
+              <c:ext xmlns:c16="http://schemas.microsoft.com/office/drawing/2014/chart" uri="{C3380CC4-5D6E-409C-BE32-E72D297353CC}">
+                <c16:uniqueId val="{00000001-9D3C-4DCD-BA8D-AB6C579BF47F}"/>
+              </c:ext>
+            </c:extLst>
+          </c:dPt>
+          <c:dPt>
+            <c:idx val="1"/>
+            <c:bubble3D val="0"/>
+            <c:spPr>
+              <a:gradFill rotWithShape="1">
+                <a:gsLst>
+                  <a:gs pos="0">
+                    <a:schemeClr val="accent2">
+                      <a:satMod val="103000"/>
+                      <a:lumMod val="102000"/>
+                      <a:tint val="94000"/>
+                    </a:schemeClr>
+                  </a:gs>
+                  <a:gs pos="50000">
+                    <a:schemeClr val="accent2">
+                      <a:satMod val="110000"/>
+                      <a:lumMod val="100000"/>
+                      <a:shade val="100000"/>
+                    </a:schemeClr>
+                  </a:gs>
+                  <a:gs pos="100000">
+                    <a:schemeClr val="accent2">
+                      <a:lumMod val="99000"/>
+                      <a:satMod val="120000"/>
+                      <a:shade val="78000"/>
+                    </a:schemeClr>
+                  </a:gs>
+                </a:gsLst>
+                <a:lin ang="5400000" scaled="0"/>
+              </a:gradFill>
+              <a:ln>
+                <a:noFill/>
+              </a:ln>
+              <a:effectLst>
+                <a:outerShdw blurRad="57150" dist="19050" dir="5400000" algn="ctr" rotWithShape="0">
+                  <a:srgbClr val="000000">
+                    <a:alpha val="63000"/>
+                  </a:srgbClr>
+                </a:outerShdw>
+              </a:effectLst>
+              <a:sp3d/>
+            </c:spPr>
+            <c:extLst>
+              <c:ext xmlns:c16="http://schemas.microsoft.com/office/drawing/2014/chart" uri="{C3380CC4-5D6E-409C-BE32-E72D297353CC}">
+                <c16:uniqueId val="{00000003-9D3C-4DCD-BA8D-AB6C579BF47F}"/>
+              </c:ext>
+            </c:extLst>
+          </c:dPt>
+          <c:cat>
+            <c:strRef>
+              <c:f>'Summary Dashboard'!$D$3:$D$4</c:f>
+              <c:strCache>
+                <c:ptCount val="2"/>
+                <c:pt idx="0">
+                  <c:v>Luxury</c:v>
+                </c:pt>
+                <c:pt idx="1">
+                  <c:v>Normal</c:v>
+                </c:pt>
+              </c:strCache>
+            </c:strRef>
+          </c:cat>
+          <c:val>
+            <c:numRef>
+              <c:f>'Summary Dashboard'!$E$3:$E$4</c:f>
+              <c:numCache>
+                <c:formatCode>General</c:formatCode>
+                <c:ptCount val="2"/>
+                <c:pt idx="0">
+                  <c:v>21</c:v>
+                </c:pt>
+                <c:pt idx="1">
+                  <c:v>8</c:v>
+                </c:pt>
+              </c:numCache>
+            </c:numRef>
+          </c:val>
+          <c:extLst>
+            <c:ext xmlns:c16="http://schemas.microsoft.com/office/drawing/2014/chart" uri="{C3380CC4-5D6E-409C-BE32-E72D297353CC}">
+              <c16:uniqueId val="{00000004-9D3C-4DCD-BA8D-AB6C579BF47F}"/>
+            </c:ext>
+          </c:extLst>
+        </c:ser>
+        <c:dLbls>
+          <c:showLegendKey val="0"/>
+          <c:showVal val="0"/>
+          <c:showCatName val="0"/>
+          <c:showSerName val="0"/>
+          <c:showPercent val="0"/>
+          <c:showBubbleSize val="0"/>
+          <c:showLeaderLines val="1"/>
+        </c:dLbls>
+      </c:pie3DChart>
+      <c:spPr>
+        <a:noFill/>
+        <a:ln>
+          <a:noFill/>
+        </a:ln>
+        <a:effectLst/>
+      </c:spPr>
+    </c:plotArea>
+    <c:legend>
+      <c:legendPos val="b"/>
+      <c:overlay val="0"/>
+      <c:spPr>
+        <a:noFill/>
+        <a:ln>
+          <a:noFill/>
+        </a:ln>
+        <a:effectLst/>
+      </c:spPr>
+      <c:txPr>
+        <a:bodyPr rot="0" spcFirstLastPara="1" vertOverflow="ellipsis" vert="horz" wrap="square" anchor="ctr" anchorCtr="1"/>
+        <a:lstStyle/>
+        <a:p>
+          <a:pPr>
+            <a:defRPr sz="900" b="0" i="0" u="none" strike="noStrike" kern="1200" baseline="0">
+              <a:solidFill>
+                <a:schemeClr val="lt1">
+                  <a:lumMod val="85000"/>
+                </a:schemeClr>
+              </a:solidFill>
+              <a:latin typeface="Times New Roman" panose="02020603050405020304" pitchFamily="18" charset="0"/>
+              <a:ea typeface="+mn-ea"/>
+              <a:cs typeface="Times New Roman" panose="02020603050405020304" pitchFamily="18" charset="0"/>
+            </a:defRPr>
+          </a:pPr>
+          <a:endParaRPr lang="en-US"/>
+        </a:p>
+      </c:txPr>
+    </c:legend>
+    <c:plotVisOnly val="1"/>
+    <c:dispBlanksAs val="gap"/>
+    <c:showDLblsOverMax val="0"/>
+    <c:extLst>
+      <c:ext xmlns:c16r3="http://schemas.microsoft.com/office/drawing/2017/03/chart" uri="{56B9EC1D-385E-4148-901F-78D8002777C0}">
+        <c16r3:dataDisplayOptions16>
+          <c16r3:dispNaAsBlank val="1"/>
+        </c16r3:dataDisplayOptions16>
+      </c:ext>
+    </c:extLst>
+  </c:chart>
+  <c:spPr>
+    <a:gradFill flip="none" rotWithShape="1">
+      <a:gsLst>
+        <a:gs pos="0">
+          <a:schemeClr val="dk1">
+            <a:lumMod val="65000"/>
+            <a:lumOff val="35000"/>
+          </a:schemeClr>
+        </a:gs>
+        <a:gs pos="100000">
+          <a:schemeClr val="dk1">
+            <a:lumMod val="85000"/>
+            <a:lumOff val="15000"/>
+          </a:schemeClr>
+        </a:gs>
+      </a:gsLst>
+      <a:path path="circle">
+        <a:fillToRect l="50000" t="50000" r="50000" b="50000"/>
+      </a:path>
+      <a:tileRect/>
+    </a:gradFill>
+    <a:ln>
+      <a:noFill/>
+    </a:ln>
+    <a:effectLst/>
+  </c:spPr>
+  <c:txPr>
+    <a:bodyPr/>
+    <a:lstStyle/>
+    <a:p>
+      <a:pPr>
+        <a:defRPr/>
+      </a:pPr>
+      <a:endParaRPr lang="en-US"/>
+    </a:p>
+  </c:txPr>
+  <c:externalData r:id="rId3">
+    <c:autoUpdate val="0"/>
+  </c:externalData>
+</c:chartSpace>
+</file>
+
+<file path=ppt/charts/colors1.xml><?xml version="1.0" encoding="utf-8"?>
+<cs:colorStyle xmlns:cs="http://schemas.microsoft.com/office/drawing/2012/chartStyle" xmlns:a="http://schemas.openxmlformats.org/drawingml/2006/main" meth="cycle" id="10">
+  <a:schemeClr val="accent1"/>
+  <a:schemeClr val="accent2"/>
+  <a:schemeClr val="accent3"/>
+  <a:schemeClr val="accent4"/>
+  <a:schemeClr val="accent5"/>
+  <a:schemeClr val="accent6"/>
+  <cs:variation/>
+  <cs:variation>
+    <a:lumMod val="60000"/>
+  </cs:variation>
+  <cs:variation>
+    <a:lumMod val="80000"/>
+    <a:lumOff val="20000"/>
+  </cs:variation>
+  <cs:variation>
+    <a:lumMod val="80000"/>
+  </cs:variation>
+  <cs:variation>
+    <a:lumMod val="60000"/>
+    <a:lumOff val="40000"/>
+  </cs:variation>
+  <cs:variation>
+    <a:lumMod val="50000"/>
+  </cs:variation>
+  <cs:variation>
+    <a:lumMod val="70000"/>
+    <a:lumOff val="30000"/>
+  </cs:variation>
+  <cs:variation>
+    <a:lumMod val="70000"/>
+  </cs:variation>
+  <cs:variation>
+    <a:lumMod val="50000"/>
+    <a:lumOff val="50000"/>
+  </cs:variation>
+</cs:colorStyle>
+</file>
+
+<file path=ppt/charts/colors2.xml><?xml version="1.0" encoding="utf-8"?>
+<cs:colorStyle xmlns:cs="http://schemas.microsoft.com/office/drawing/2012/chartStyle" xmlns:a="http://schemas.openxmlformats.org/drawingml/2006/main" meth="cycle" id="10">
+  <a:schemeClr val="accent1"/>
+  <a:schemeClr val="accent2"/>
+  <a:schemeClr val="accent3"/>
+  <a:schemeClr val="accent4"/>
+  <a:schemeClr val="accent5"/>
+  <a:schemeClr val="accent6"/>
+  <cs:variation/>
+  <cs:variation>
+    <a:lumMod val="60000"/>
+  </cs:variation>
+  <cs:variation>
+    <a:lumMod val="80000"/>
+    <a:lumOff val="20000"/>
+  </cs:variation>
+  <cs:variation>
+    <a:lumMod val="80000"/>
+  </cs:variation>
+  <cs:variation>
+    <a:lumMod val="60000"/>
+    <a:lumOff val="40000"/>
+  </cs:variation>
+  <cs:variation>
+    <a:lumMod val="50000"/>
+  </cs:variation>
+  <cs:variation>
+    <a:lumMod val="70000"/>
+    <a:lumOff val="30000"/>
+  </cs:variation>
+  <cs:variation>
+    <a:lumMod val="70000"/>
+  </cs:variation>
+  <cs:variation>
+    <a:lumMod val="50000"/>
+    <a:lumOff val="50000"/>
+  </cs:variation>
+</cs:colorStyle>
+</file>
+
+<file path=ppt/charts/style1.xml><?xml version="1.0" encoding="utf-8"?>
+<cs:chartStyle xmlns:cs="http://schemas.microsoft.com/office/drawing/2012/chartStyle" xmlns:a="http://schemas.openxmlformats.org/drawingml/2006/main" id="294">
+  <cs:axisTitle>
+    <cs:lnRef idx="0"/>
+    <cs:fillRef idx="0"/>
+    <cs:effectRef idx="0"/>
+    <cs:fontRef idx="minor">
+      <a:schemeClr val="lt1">
+        <a:lumMod val="85000"/>
+      </a:schemeClr>
+    </cs:fontRef>
+    <cs:defRPr sz="900" b="1" kern="1200" cap="all"/>
+  </cs:axisTitle>
+  <cs:categoryAxis>
+    <cs:lnRef idx="0"/>
+    <cs:fillRef idx="0"/>
+    <cs:effectRef idx="0"/>
+    <cs:fontRef idx="minor">
+      <a:schemeClr val="lt1">
+        <a:lumMod val="85000"/>
+      </a:schemeClr>
+    </cs:fontRef>
+    <cs:spPr/>
+    <cs:defRPr sz="900" kern="1200"/>
+  </cs:categoryAxis>
+  <cs:chartArea>
+    <cs:lnRef idx="0"/>
+    <cs:fillRef idx="0"/>
+    <cs:effectRef idx="0"/>
+    <cs:fontRef idx="minor">
+      <a:schemeClr val="dk1"/>
+    </cs:fontRef>
+    <cs:spPr>
+      <a:gradFill flip="none" rotWithShape="1">
+        <a:gsLst>
+          <a:gs pos="0">
+            <a:schemeClr val="dk1">
+              <a:lumMod val="65000"/>
+              <a:lumOff val="35000"/>
+            </a:schemeClr>
+          </a:gs>
+          <a:gs pos="100000">
+            <a:schemeClr val="dk1">
+              <a:lumMod val="85000"/>
+              <a:lumOff val="15000"/>
+            </a:schemeClr>
+          </a:gs>
+        </a:gsLst>
+        <a:path path="circle">
+          <a:fillToRect l="50000" t="50000" r="50000" b="50000"/>
+        </a:path>
+        <a:tileRect/>
+      </a:gradFill>
+    </cs:spPr>
+    <cs:defRPr sz="1000" kern="1200"/>
+  </cs:chartArea>
+  <cs:dataLabel>
+    <cs:lnRef idx="0"/>
+    <cs:fillRef idx="0"/>
+    <cs:effectRef idx="0"/>
+    <cs:fontRef idx="minor">
+      <a:schemeClr val="lt1">
+        <a:lumMod val="85000"/>
+      </a:schemeClr>
+    </cs:fontRef>
+    <cs:defRPr sz="900" kern="1200"/>
+  </cs:dataLabel>
+  <cs:dataLabelCallout>
+    <cs:lnRef idx="0"/>
+    <cs:fillRef idx="0"/>
+    <cs:effectRef idx="0"/>
+    <cs:fontRef idx="minor">
+      <a:schemeClr val="dk1">
+        <a:lumMod val="65000"/>
+        <a:lumOff val="35000"/>
+      </a:schemeClr>
+    </cs:fontRef>
+    <cs:spPr>
+      <a:solidFill>
+        <a:schemeClr val="lt1"/>
+      </a:solidFill>
+    </cs:spPr>
+    <cs:defRPr sz="900" kern="1200"/>
+    <cs:bodyPr rot="0" spcFirstLastPara="1" vertOverflow="clip" horzOverflow="clip" vert="horz" wrap="square" lIns="36576" tIns="18288" rIns="36576" bIns="18288" anchor="ctr" anchorCtr="1">
+      <a:spAutoFit/>
+    </cs:bodyPr>
+  </cs:dataLabelCallout>
+  <cs:dataPoint>
+    <cs:lnRef idx="0"/>
+    <cs:fillRef idx="3">
+      <cs:styleClr val="auto"/>
+    </cs:fillRef>
+    <cs:effectRef idx="3"/>
+    <cs:fontRef idx="minor">
+      <a:schemeClr val="tx1"/>
+    </cs:fontRef>
+  </cs:dataPoint>
+  <cs:dataPoint3D>
+    <cs:lnRef idx="0"/>
+    <cs:fillRef idx="3">
+      <cs:styleClr val="auto"/>
+    </cs:fillRef>
+    <cs:effectRef idx="3"/>
+    <cs:fontRef idx="minor">
+      <a:schemeClr val="tx1"/>
+    </cs:fontRef>
+  </cs:dataPoint3D>
+  <cs:dataPointLine>
+    <cs:lnRef idx="0">
+      <cs:styleClr val="auto"/>
+    </cs:lnRef>
+    <cs:fillRef idx="3"/>
+    <cs:effectRef idx="3"/>
+    <cs:fontRef idx="minor">
+      <a:schemeClr val="tx1"/>
+    </cs:fontRef>
+    <cs:spPr>
+      <a:ln w="34925" cap="rnd">
+        <a:solidFill>
+          <a:schemeClr val="phClr"/>
+        </a:solidFill>
+        <a:round/>
+      </a:ln>
+    </cs:spPr>
+  </cs:dataPointLine>
+  <cs:dataPointMarker>
+    <cs:lnRef idx="0">
+      <cs:styleClr val="auto"/>
+    </cs:lnRef>
+    <cs:fillRef idx="3">
+      <cs:styleClr val="auto"/>
+    </cs:fillRef>
+    <cs:effectRef idx="3"/>
+    <cs:fontRef idx="minor">
+      <a:schemeClr val="tx1"/>
+    </cs:fontRef>
+    <cs:spPr>
+      <a:ln w="9525">
+        <a:solidFill>
+          <a:schemeClr val="phClr"/>
+        </a:solidFill>
+        <a:round/>
+      </a:ln>
+    </cs:spPr>
+  </cs:dataPointMarker>
+  <cs:dataPointMarkerLayout symbol="circle" size="6"/>
+  <cs:dataPointWireframe>
+    <cs:lnRef idx="0">
+      <cs:styleClr val="auto"/>
+    </cs:lnRef>
+    <cs:fillRef idx="3"/>
+    <cs:effectRef idx="3"/>
+    <cs:fontRef idx="minor">
+      <a:schemeClr val="tx1"/>
+    </cs:fontRef>
+    <cs:spPr>
+      <a:ln w="9525" cap="rnd">
+        <a:solidFill>
+          <a:schemeClr val="phClr"/>
+        </a:solidFill>
+        <a:round/>
+      </a:ln>
+    </cs:spPr>
+  </cs:dataPointWireframe>
+  <cs:dataTable>
+    <cs:lnRef idx="0"/>
+    <cs:fillRef idx="0"/>
+    <cs:effectRef idx="0"/>
+    <cs:fontRef idx="minor">
+      <a:schemeClr val="lt1">
+        <a:lumMod val="85000"/>
+      </a:schemeClr>
+    </cs:fontRef>
+    <cs:spPr>
+      <a:ln w="9525">
+        <a:solidFill>
+          <a:schemeClr val="lt1">
+            <a:lumMod val="95000"/>
+            <a:alpha val="54000"/>
+          </a:schemeClr>
+        </a:solidFill>
+      </a:ln>
+    </cs:spPr>
+    <cs:defRPr sz="900" kern="1200"/>
+  </cs:dataTable>
+  <cs:downBar>
+    <cs:lnRef idx="0"/>
+    <cs:fillRef idx="0"/>
+    <cs:effectRef idx="0"/>
+    <cs:fontRef idx="minor">
+      <a:schemeClr val="tx1"/>
+    </cs:fontRef>
+    <cs:spPr>
+      <a:solidFill>
+        <a:schemeClr val="dk1">
+          <a:lumMod val="75000"/>
+          <a:lumOff val="25000"/>
+        </a:schemeClr>
+      </a:solidFill>
+      <a:ln w="9525">
+        <a:solidFill>
+          <a:schemeClr val="lt1">
+            <a:lumMod val="95000"/>
+            <a:alpha val="54000"/>
+          </a:schemeClr>
+        </a:solidFill>
+      </a:ln>
+    </cs:spPr>
+  </cs:downBar>
+  <cs:dropLine>
+    <cs:lnRef idx="0"/>
+    <cs:fillRef idx="0"/>
+    <cs:effectRef idx="0"/>
+    <cs:fontRef idx="minor">
+      <a:schemeClr val="tx1"/>
+    </cs:fontRef>
+    <cs:spPr>
+      <a:ln w="9525">
+        <a:solidFill>
+          <a:schemeClr val="lt1">
+            <a:lumMod val="95000"/>
+            <a:alpha val="54000"/>
+          </a:schemeClr>
+        </a:solidFill>
+        <a:prstDash val="dash"/>
+      </a:ln>
+    </cs:spPr>
+  </cs:dropLine>
+  <cs:errorBar>
+    <cs:lnRef idx="0"/>
+    <cs:fillRef idx="0"/>
+    <cs:effectRef idx="0"/>
+    <cs:fontRef idx="minor">
+      <a:schemeClr val="tx1"/>
+    </cs:fontRef>
+    <cs:spPr>
+      <a:ln w="9525" cap="flat" cmpd="sng" algn="ctr">
+        <a:solidFill>
+          <a:schemeClr val="lt1">
+            <a:lumMod val="95000"/>
+          </a:schemeClr>
+        </a:solidFill>
+        <a:round/>
+      </a:ln>
+    </cs:spPr>
+  </cs:errorBar>
+  <cs:floor>
+    <cs:lnRef idx="0"/>
+    <cs:fillRef idx="0"/>
+    <cs:effectRef idx="0"/>
+    <cs:fontRef idx="minor">
+      <a:schemeClr val="tx1"/>
+    </cs:fontRef>
+  </cs:floor>
+  <cs:gridlineMajor>
+    <cs:lnRef idx="0"/>
+    <cs:fillRef idx="0"/>
+    <cs:effectRef idx="0"/>
+    <cs:fontRef idx="minor">
+      <a:schemeClr val="tx1"/>
+    </cs:fontRef>
+    <cs:spPr>
+      <a:ln w="9525" cap="flat" cmpd="sng" algn="ctr">
+        <a:solidFill>
+          <a:schemeClr val="dk1">
+            <a:lumMod val="50000"/>
+            <a:lumOff val="50000"/>
+          </a:schemeClr>
+        </a:solidFill>
+        <a:round/>
+      </a:ln>
+    </cs:spPr>
+  </cs:gridlineMajor>
+  <cs:gridlineMinor>
+    <cs:lnRef idx="0"/>
+    <cs:fillRef idx="0"/>
+    <cs:effectRef idx="0"/>
+    <cs:fontRef idx="minor">
+      <a:schemeClr val="tx1"/>
+    </cs:fontRef>
+    <cs:spPr>
+      <a:ln>
+        <a:solidFill>
+          <a:schemeClr val="dk1">
+            <a:lumMod val="60000"/>
+            <a:lumOff val="40000"/>
+          </a:schemeClr>
+        </a:solidFill>
+      </a:ln>
+    </cs:spPr>
+  </cs:gridlineMinor>
+  <cs:hiLoLine>
+    <cs:lnRef idx="0"/>
+    <cs:fillRef idx="0"/>
+    <cs:effectRef idx="0"/>
+    <cs:fontRef idx="minor">
+      <a:schemeClr val="tx1"/>
+    </cs:fontRef>
+    <cs:spPr>
+      <a:ln w="9525">
+        <a:solidFill>
+          <a:schemeClr val="lt1">
+            <a:lumMod val="95000"/>
+            <a:alpha val="54000"/>
+          </a:schemeClr>
+        </a:solidFill>
+        <a:prstDash val="dash"/>
+      </a:ln>
+    </cs:spPr>
+  </cs:hiLoLine>
+  <cs:leaderLine>
+    <cs:lnRef idx="0"/>
+    <cs:fillRef idx="0"/>
+    <cs:effectRef idx="0"/>
+    <cs:fontRef idx="minor">
+      <a:schemeClr val="tx1"/>
+    </cs:fontRef>
+    <cs:spPr>
+      <a:ln w="9525">
+        <a:solidFill>
+          <a:schemeClr val="lt1">
+            <a:lumMod val="95000"/>
+            <a:alpha val="54000"/>
+          </a:schemeClr>
+        </a:solidFill>
+      </a:ln>
+    </cs:spPr>
+  </cs:leaderLine>
+  <cs:legend>
+    <cs:lnRef idx="0"/>
+    <cs:fillRef idx="0"/>
+    <cs:effectRef idx="0"/>
+    <cs:fontRef idx="minor">
+      <a:schemeClr val="lt1">
+        <a:lumMod val="85000"/>
+      </a:schemeClr>
+    </cs:fontRef>
+    <cs:defRPr sz="900" kern="1200"/>
+  </cs:legend>
+  <cs:plotArea>
+    <cs:lnRef idx="0"/>
+    <cs:fillRef idx="0"/>
+    <cs:effectRef idx="0"/>
+    <cs:fontRef idx="minor">
+      <a:schemeClr val="tx1"/>
+    </cs:fontRef>
+  </cs:plotArea>
+  <cs:plotArea3D>
+    <cs:lnRef idx="0"/>
+    <cs:fillRef idx="0"/>
+    <cs:effectRef idx="0"/>
+    <cs:fontRef idx="minor">
+      <a:schemeClr val="tx1"/>
+    </cs:fontRef>
+  </cs:plotArea3D>
+  <cs:seriesAxis>
+    <cs:lnRef idx="0"/>
+    <cs:fillRef idx="0"/>
+    <cs:effectRef idx="0"/>
+    <cs:fontRef idx="minor">
+      <a:schemeClr val="lt1">
+        <a:lumMod val="85000"/>
+      </a:schemeClr>
+    </cs:fontRef>
+    <cs:spPr/>
+    <cs:defRPr sz="900" kern="1200"/>
+  </cs:seriesAxis>
+  <cs:seriesLine>
+    <cs:lnRef idx="0"/>
+    <cs:fillRef idx="0"/>
+    <cs:effectRef idx="0"/>
+    <cs:fontRef idx="minor">
+      <a:schemeClr val="lt1"/>
+    </cs:fontRef>
+    <cs:spPr>
+      <a:ln w="9525" cap="flat" cmpd="sng" algn="ctr">
+        <a:solidFill>
+          <a:schemeClr val="lt1">
+            <a:lumMod val="95000"/>
+            <a:alpha val="54000"/>
+          </a:schemeClr>
+        </a:solidFill>
+        <a:round/>
+      </a:ln>
+    </cs:spPr>
+  </cs:seriesLine>
+  <cs:title>
+    <cs:lnRef idx="0"/>
+    <cs:fillRef idx="0"/>
+    <cs:effectRef idx="0"/>
+    <cs:fontRef idx="minor">
+      <a:schemeClr val="lt1">
+        <a:lumMod val="95000"/>
+      </a:schemeClr>
+    </cs:fontRef>
+    <cs:defRPr sz="1600" b="1" kern="1200" spc="100" baseline="0">
+      <a:effectLst>
+        <a:outerShdw blurRad="50800" dist="38100" dir="5400000" algn="t" rotWithShape="0">
+          <a:prstClr val="black">
+            <a:alpha val="40000"/>
+          </a:prstClr>
+        </a:outerShdw>
+      </a:effectLst>
+    </cs:defRPr>
+  </cs:title>
+  <cs:trendline>
+    <cs:lnRef idx="0">
+      <cs:styleClr val="auto"/>
+    </cs:lnRef>
+    <cs:fillRef idx="0"/>
+    <cs:effectRef idx="0"/>
+    <cs:fontRef idx="minor">
+      <a:schemeClr val="tx1"/>
+    </cs:fontRef>
+    <cs:spPr>
+      <a:ln w="19050" cap="rnd">
+        <a:solidFill>
+          <a:schemeClr val="phClr"/>
+        </a:solidFill>
+      </a:ln>
+    </cs:spPr>
+  </cs:trendline>
+  <cs:trendlineLabel>
+    <cs:lnRef idx="0"/>
+    <cs:fillRef idx="0"/>
+    <cs:effectRef idx="0"/>
+    <cs:fontRef idx="minor">
+      <a:schemeClr val="lt1">
+        <a:lumMod val="85000"/>
+      </a:schemeClr>
+    </cs:fontRef>
+    <cs:defRPr sz="900" kern="1200"/>
+  </cs:trendlineLabel>
+  <cs:upBar>
+    <cs:lnRef idx="0"/>
+    <cs:fillRef idx="0"/>
+    <cs:effectRef idx="0"/>
+    <cs:fontRef idx="minor">
+      <a:schemeClr val="tx1"/>
+    </cs:fontRef>
+    <cs:spPr>
+      <a:solidFill>
+        <a:schemeClr val="lt1"/>
+      </a:solidFill>
+      <a:ln w="9525">
+        <a:solidFill>
+          <a:schemeClr val="lt1">
+            <a:lumMod val="95000"/>
+            <a:alpha val="54000"/>
+          </a:schemeClr>
+        </a:solidFill>
+      </a:ln>
+    </cs:spPr>
+  </cs:upBar>
+  <cs:valueAxis>
+    <cs:lnRef idx="0"/>
+    <cs:fillRef idx="0"/>
+    <cs:effectRef idx="0"/>
+    <cs:fontRef idx="minor">
+      <a:schemeClr val="lt1">
+        <a:lumMod val="85000"/>
+      </a:schemeClr>
+    </cs:fontRef>
+    <cs:defRPr sz="900" kern="1200"/>
+  </cs:valueAxis>
+  <cs:wall>
+    <cs:lnRef idx="0"/>
+    <cs:fillRef idx="0"/>
+    <cs:effectRef idx="0"/>
+    <cs:fontRef idx="minor">
+      <a:schemeClr val="tx1"/>
+    </cs:fontRef>
+  </cs:wall>
+</cs:chartStyle>
+</file>
+
+<file path=ppt/charts/style2.xml><?xml version="1.0" encoding="utf-8"?>
+<cs:chartStyle xmlns:cs="http://schemas.microsoft.com/office/drawing/2012/chartStyle" xmlns:a="http://schemas.openxmlformats.org/drawingml/2006/main" id="268">
+  <cs:axisTitle>
+    <cs:lnRef idx="0"/>
+    <cs:fillRef idx="0"/>
+    <cs:effectRef idx="0"/>
+    <cs:fontRef idx="minor">
+      <a:schemeClr val="lt1">
+        <a:lumMod val="85000"/>
+      </a:schemeClr>
+    </cs:fontRef>
+    <cs:defRPr sz="900" b="1" kern="1200" cap="all"/>
+  </cs:axisTitle>
+  <cs:categoryAxis>
+    <cs:lnRef idx="0"/>
+    <cs:fillRef idx="0"/>
+    <cs:effectRef idx="0"/>
+    <cs:fontRef idx="minor">
+      <a:schemeClr val="lt1">
+        <a:lumMod val="85000"/>
+      </a:schemeClr>
+    </cs:fontRef>
+    <cs:spPr>
+      <a:ln w="12700" cap="flat" cmpd="sng" algn="ctr">
+        <a:solidFill>
+          <a:schemeClr val="lt1">
+            <a:lumMod val="95000"/>
+            <a:alpha val="54000"/>
+          </a:schemeClr>
+        </a:solidFill>
+        <a:round/>
+      </a:ln>
+    </cs:spPr>
+    <cs:defRPr sz="900" kern="1200"/>
+  </cs:categoryAxis>
+  <cs:chartArea>
+    <cs:lnRef idx="0"/>
+    <cs:fillRef idx="0"/>
+    <cs:effectRef idx="0"/>
+    <cs:fontRef idx="minor">
+      <a:schemeClr val="dk1"/>
+    </cs:fontRef>
+    <cs:spPr>
+      <a:gradFill flip="none" rotWithShape="1">
+        <a:gsLst>
+          <a:gs pos="0">
+            <a:schemeClr val="dk1">
+              <a:lumMod val="65000"/>
+              <a:lumOff val="35000"/>
+            </a:schemeClr>
+          </a:gs>
+          <a:gs pos="100000">
+            <a:schemeClr val="dk1">
+              <a:lumMod val="85000"/>
+              <a:lumOff val="15000"/>
+            </a:schemeClr>
+          </a:gs>
+        </a:gsLst>
+        <a:path path="circle">
+          <a:fillToRect l="50000" t="50000" r="50000" b="50000"/>
+        </a:path>
+        <a:tileRect/>
+      </a:gradFill>
+    </cs:spPr>
+    <cs:defRPr sz="1000" kern="1200"/>
+  </cs:chartArea>
+  <cs:dataLabel>
+    <cs:lnRef idx="0"/>
+    <cs:fillRef idx="0"/>
+    <cs:effectRef idx="0"/>
+    <cs:fontRef idx="minor">
+      <a:schemeClr val="lt1">
+        <a:lumMod val="85000"/>
+      </a:schemeClr>
+    </cs:fontRef>
+    <cs:defRPr sz="900" kern="1200"/>
+  </cs:dataLabel>
+  <cs:dataLabelCallout>
+    <cs:lnRef idx="0"/>
+    <cs:fillRef idx="0"/>
+    <cs:effectRef idx="0"/>
+    <cs:fontRef idx="minor">
+      <a:schemeClr val="dk1">
+        <a:lumMod val="65000"/>
+        <a:lumOff val="35000"/>
+      </a:schemeClr>
+    </cs:fontRef>
+    <cs:spPr>
+      <a:solidFill>
+        <a:schemeClr val="lt1"/>
+      </a:solidFill>
+    </cs:spPr>
+    <cs:defRPr sz="900" kern="1200"/>
+    <cs:bodyPr rot="0" spcFirstLastPara="1" vertOverflow="clip" horzOverflow="clip" vert="horz" wrap="square" lIns="36576" tIns="18288" rIns="36576" bIns="18288" anchor="ctr" anchorCtr="1">
+      <a:spAutoFit/>
+    </cs:bodyPr>
+  </cs:dataLabelCallout>
+  <cs:dataPoint>
+    <cs:lnRef idx="0"/>
+    <cs:fillRef idx="3">
+      <cs:styleClr val="auto"/>
+    </cs:fillRef>
+    <cs:effectRef idx="3"/>
+    <cs:fontRef idx="minor">
+      <a:schemeClr val="tx1"/>
+    </cs:fontRef>
+  </cs:dataPoint>
+  <cs:dataPoint3D>
+    <cs:lnRef idx="0"/>
+    <cs:fillRef idx="3">
+      <cs:styleClr val="auto"/>
+    </cs:fillRef>
+    <cs:effectRef idx="3"/>
+    <cs:fontRef idx="minor">
+      <a:schemeClr val="tx1"/>
+    </cs:fontRef>
+  </cs:dataPoint3D>
+  <cs:dataPointLine>
+    <cs:lnRef idx="0">
+      <cs:styleClr val="auto"/>
+    </cs:lnRef>
+    <cs:fillRef idx="3"/>
+    <cs:effectRef idx="3"/>
+    <cs:fontRef idx="minor">
+      <a:schemeClr val="tx1"/>
+    </cs:fontRef>
+    <cs:spPr>
+      <a:ln w="34925" cap="rnd">
+        <a:solidFill>
+          <a:schemeClr val="phClr"/>
+        </a:solidFill>
+        <a:round/>
+      </a:ln>
+    </cs:spPr>
+  </cs:dataPointLine>
+  <cs:dataPointMarker>
+    <cs:lnRef idx="0">
+      <cs:styleClr val="auto"/>
+    </cs:lnRef>
+    <cs:fillRef idx="3">
+      <cs:styleClr val="auto"/>
+    </cs:fillRef>
+    <cs:effectRef idx="3"/>
+    <cs:fontRef idx="minor">
+      <a:schemeClr val="tx1"/>
+    </cs:fontRef>
+    <cs:spPr>
+      <a:ln w="9525">
+        <a:solidFill>
+          <a:schemeClr val="phClr"/>
+        </a:solidFill>
+        <a:round/>
+      </a:ln>
+    </cs:spPr>
+  </cs:dataPointMarker>
+  <cs:dataPointMarkerLayout symbol="circle" size="6"/>
+  <cs:dataPointWireframe>
+    <cs:lnRef idx="0">
+      <cs:styleClr val="auto"/>
+    </cs:lnRef>
+    <cs:fillRef idx="3"/>
+    <cs:effectRef idx="3"/>
+    <cs:fontRef idx="minor">
+      <a:schemeClr val="tx1"/>
+    </cs:fontRef>
+    <cs:spPr>
+      <a:ln w="9525" cap="rnd">
+        <a:solidFill>
+          <a:schemeClr val="phClr"/>
+        </a:solidFill>
+        <a:round/>
+      </a:ln>
+    </cs:spPr>
+  </cs:dataPointWireframe>
+  <cs:dataTable>
+    <cs:lnRef idx="0"/>
+    <cs:fillRef idx="0"/>
+    <cs:effectRef idx="0"/>
+    <cs:fontRef idx="minor">
+      <a:schemeClr val="lt1">
+        <a:lumMod val="85000"/>
+      </a:schemeClr>
+    </cs:fontRef>
+    <cs:spPr>
+      <a:ln w="9525">
+        <a:solidFill>
+          <a:schemeClr val="lt1">
+            <a:lumMod val="95000"/>
+            <a:alpha val="54000"/>
+          </a:schemeClr>
+        </a:solidFill>
+      </a:ln>
+    </cs:spPr>
+    <cs:defRPr sz="900" kern="1200"/>
+  </cs:dataTable>
+  <cs:downBar>
+    <cs:lnRef idx="0"/>
+    <cs:fillRef idx="0"/>
+    <cs:effectRef idx="0"/>
+    <cs:fontRef idx="minor">
+      <a:schemeClr val="tx1"/>
+    </cs:fontRef>
+    <cs:spPr>
+      <a:solidFill>
+        <a:schemeClr val="dk1">
+          <a:lumMod val="75000"/>
+          <a:lumOff val="25000"/>
+        </a:schemeClr>
+      </a:solidFill>
+      <a:ln w="9525">
+        <a:solidFill>
+          <a:schemeClr val="lt1">
+            <a:lumMod val="95000"/>
+            <a:alpha val="54000"/>
+          </a:schemeClr>
+        </a:solidFill>
+      </a:ln>
+    </cs:spPr>
+  </cs:downBar>
+  <cs:dropLine>
+    <cs:lnRef idx="0"/>
+    <cs:fillRef idx="0"/>
+    <cs:effectRef idx="0"/>
+    <cs:fontRef idx="minor">
+      <a:schemeClr val="tx1"/>
+    </cs:fontRef>
+    <cs:spPr>
+      <a:ln w="9525">
+        <a:solidFill>
+          <a:schemeClr val="lt1">
+            <a:lumMod val="95000"/>
+            <a:alpha val="54000"/>
+          </a:schemeClr>
+        </a:solidFill>
+        <a:prstDash val="dash"/>
+      </a:ln>
+    </cs:spPr>
+  </cs:dropLine>
+  <cs:errorBar>
+    <cs:lnRef idx="0"/>
+    <cs:fillRef idx="0"/>
+    <cs:effectRef idx="0"/>
+    <cs:fontRef idx="minor">
+      <a:schemeClr val="tx1"/>
+    </cs:fontRef>
+    <cs:spPr>
+      <a:ln w="9525" cap="flat" cmpd="sng" algn="ctr">
+        <a:solidFill>
+          <a:schemeClr val="lt1">
+            <a:lumMod val="95000"/>
+          </a:schemeClr>
+        </a:solidFill>
+        <a:round/>
+      </a:ln>
+    </cs:spPr>
+  </cs:errorBar>
+  <cs:floor>
+    <cs:lnRef idx="0"/>
+    <cs:fillRef idx="0"/>
+    <cs:effectRef idx="0"/>
+    <cs:fontRef idx="minor">
+      <a:schemeClr val="tx1"/>
+    </cs:fontRef>
+  </cs:floor>
+  <cs:gridlineMajor>
+    <cs:lnRef idx="0"/>
+    <cs:fillRef idx="0"/>
+    <cs:effectRef idx="0"/>
+    <cs:fontRef idx="minor">
+      <a:schemeClr val="tx1"/>
+    </cs:fontRef>
+    <cs:spPr>
+      <a:ln w="9525" cap="flat" cmpd="sng" algn="ctr">
+        <a:solidFill>
+          <a:schemeClr val="lt1">
+            <a:lumMod val="95000"/>
+            <a:alpha val="10000"/>
+          </a:schemeClr>
+        </a:solidFill>
+        <a:round/>
+      </a:ln>
+    </cs:spPr>
+  </cs:gridlineMajor>
+  <cs:gridlineMinor>
+    <cs:lnRef idx="0"/>
+    <cs:fillRef idx="0"/>
+    <cs:effectRef idx="0"/>
+    <cs:fontRef idx="minor">
+      <a:schemeClr val="tx1"/>
+    </cs:fontRef>
+    <cs:spPr>
+      <a:ln>
+        <a:solidFill>
+          <a:schemeClr val="lt1">
+            <a:lumMod val="95000"/>
+            <a:alpha val="5000"/>
+          </a:schemeClr>
+        </a:solidFill>
+      </a:ln>
+    </cs:spPr>
+  </cs:gridlineMinor>
+  <cs:hiLoLine>
+    <cs:lnRef idx="0"/>
+    <cs:fillRef idx="0"/>
+    <cs:effectRef idx="0"/>
+    <cs:fontRef idx="minor">
+      <a:schemeClr val="tx1"/>
+    </cs:fontRef>
+    <cs:spPr>
+      <a:ln w="9525">
+        <a:solidFill>
+          <a:schemeClr val="lt1">
+            <a:lumMod val="95000"/>
+            <a:alpha val="54000"/>
+          </a:schemeClr>
+        </a:solidFill>
+        <a:prstDash val="dash"/>
+      </a:ln>
+    </cs:spPr>
+  </cs:hiLoLine>
+  <cs:leaderLine>
+    <cs:lnRef idx="0"/>
+    <cs:fillRef idx="0"/>
+    <cs:effectRef idx="0"/>
+    <cs:fontRef idx="minor">
+      <a:schemeClr val="tx1"/>
+    </cs:fontRef>
+    <cs:spPr>
+      <a:ln w="9525">
+        <a:solidFill>
+          <a:schemeClr val="lt1">
+            <a:lumMod val="95000"/>
+            <a:alpha val="54000"/>
+          </a:schemeClr>
+        </a:solidFill>
+      </a:ln>
+    </cs:spPr>
+  </cs:leaderLine>
+  <cs:legend>
+    <cs:lnRef idx="0"/>
+    <cs:fillRef idx="0"/>
+    <cs:effectRef idx="0"/>
+    <cs:fontRef idx="minor">
+      <a:schemeClr val="lt1">
+        <a:lumMod val="85000"/>
+      </a:schemeClr>
+    </cs:fontRef>
+    <cs:defRPr sz="900" kern="1200"/>
+  </cs:legend>
+  <cs:plotArea>
+    <cs:lnRef idx="0"/>
+    <cs:fillRef idx="0"/>
+    <cs:effectRef idx="0"/>
+    <cs:fontRef idx="minor">
+      <a:schemeClr val="tx1"/>
+    </cs:fontRef>
+  </cs:plotArea>
+  <cs:plotArea3D>
+    <cs:lnRef idx="0"/>
+    <cs:fillRef idx="0"/>
+    <cs:effectRef idx="0"/>
+    <cs:fontRef idx="minor">
+      <a:schemeClr val="tx1"/>
+    </cs:fontRef>
+  </cs:plotArea3D>
+  <cs:seriesAxis>
+    <cs:lnRef idx="0"/>
+    <cs:fillRef idx="0"/>
+    <cs:effectRef idx="0"/>
+    <cs:fontRef idx="minor">
+      <a:schemeClr val="lt1">
+        <a:lumMod val="85000"/>
+      </a:schemeClr>
+    </cs:fontRef>
+    <cs:spPr>
+      <a:ln w="12700" cap="flat" cmpd="sng" algn="ctr">
+        <a:solidFill>
+          <a:schemeClr val="lt1">
+            <a:lumMod val="95000"/>
+            <a:alpha val="54000"/>
+          </a:schemeClr>
+        </a:solidFill>
+        <a:round/>
+      </a:ln>
+    </cs:spPr>
+    <cs:defRPr sz="900" kern="1200"/>
+  </cs:seriesAxis>
+  <cs:seriesLine>
+    <cs:lnRef idx="0"/>
+    <cs:fillRef idx="0"/>
+    <cs:effectRef idx="0"/>
+    <cs:fontRef idx="minor">
+      <a:schemeClr val="lt1"/>
+    </cs:fontRef>
+    <cs:spPr>
+      <a:ln w="9525" cap="flat" cmpd="sng" algn="ctr">
+        <a:solidFill>
+          <a:schemeClr val="lt1">
+            <a:lumMod val="95000"/>
+            <a:alpha val="54000"/>
+          </a:schemeClr>
+        </a:solidFill>
+        <a:round/>
+      </a:ln>
+    </cs:spPr>
+  </cs:seriesLine>
+  <cs:title>
+    <cs:lnRef idx="0"/>
+    <cs:fillRef idx="0"/>
+    <cs:effectRef idx="0"/>
+    <cs:fontRef idx="minor">
+      <a:schemeClr val="lt1">
+        <a:lumMod val="95000"/>
+      </a:schemeClr>
+    </cs:fontRef>
+    <cs:defRPr sz="1600" b="1" kern="1200" spc="100" baseline="0">
+      <a:effectLst>
+        <a:outerShdw blurRad="50800" dist="38100" dir="5400000" algn="t" rotWithShape="0">
+          <a:prstClr val="black">
+            <a:alpha val="40000"/>
+          </a:prstClr>
+        </a:outerShdw>
+      </a:effectLst>
+    </cs:defRPr>
+  </cs:title>
+  <cs:trendline>
+    <cs:lnRef idx="0">
+      <cs:styleClr val="auto"/>
+    </cs:lnRef>
+    <cs:fillRef idx="0"/>
+    <cs:effectRef idx="0"/>
+    <cs:fontRef idx="minor">
+      <a:schemeClr val="tx1"/>
+    </cs:fontRef>
+    <cs:spPr>
+      <a:ln w="19050" cap="rnd">
+        <a:solidFill>
+          <a:schemeClr val="phClr"/>
+        </a:solidFill>
+      </a:ln>
+    </cs:spPr>
+  </cs:trendline>
+  <cs:trendlineLabel>
+    <cs:lnRef idx="0"/>
+    <cs:fillRef idx="0"/>
+    <cs:effectRef idx="0"/>
+    <cs:fontRef idx="minor">
+      <a:schemeClr val="lt1">
+        <a:lumMod val="85000"/>
+      </a:schemeClr>
+    </cs:fontRef>
+    <cs:defRPr sz="900" kern="1200"/>
+  </cs:trendlineLabel>
+  <cs:upBar>
+    <cs:lnRef idx="0"/>
+    <cs:fillRef idx="0"/>
+    <cs:effectRef idx="0"/>
+    <cs:fontRef idx="minor">
+      <a:schemeClr val="tx1"/>
+    </cs:fontRef>
+    <cs:spPr>
+      <a:solidFill>
+        <a:schemeClr val="lt1"/>
+      </a:solidFill>
+      <a:ln w="9525">
+        <a:solidFill>
+          <a:schemeClr val="lt1">
+            <a:lumMod val="95000"/>
+            <a:alpha val="54000"/>
+          </a:schemeClr>
+        </a:solidFill>
+      </a:ln>
+    </cs:spPr>
+  </cs:upBar>
+  <cs:valueAxis>
+    <cs:lnRef idx="0"/>
+    <cs:fillRef idx="0"/>
+    <cs:effectRef idx="0"/>
+    <cs:fontRef idx="minor">
+      <a:schemeClr val="lt1">
+        <a:lumMod val="85000"/>
+      </a:schemeClr>
+    </cs:fontRef>
+    <cs:defRPr sz="900" kern="1200"/>
+  </cs:valueAxis>
+  <cs:wall>
+    <cs:lnRef idx="0"/>
+    <cs:fillRef idx="0"/>
+    <cs:effectRef idx="0"/>
+    <cs:fontRef idx="minor">
+      <a:schemeClr val="tx1"/>
+    </cs:fontRef>
+  </cs:wall>
+</cs:chartStyle>
+</file>
+
 <file path=ppt/notesMasters/notesMaster1.xml><?xml version="1.0" encoding="utf-8"?>
 <p:notesMaster xmlns:a="http://schemas.openxmlformats.org/drawingml/2006/main" xmlns:r="http://schemas.openxmlformats.org/officeDocument/2006/relationships" xmlns:p="http://schemas.openxmlformats.org/presentationml/2006/main">
   <p:cSld>
@@ -214,7 +2079,7 @@
           <a:p>
             <a:fld id="{8DC3DDCC-ED81-4892-8D22-592A1E74472D}" type="datetimeFigureOut">
               <a:rPr lang="en-GB" smtClean="0"/>
-              <a:t>03/01/2026</a:t>
+              <a:t>04/01/2026</a:t>
             </a:fld>
             <a:endParaRPr lang="en-GB"/>
           </a:p>
@@ -837,7 +2702,7 @@
           <a:p>
             <a:fld id="{BFF902D8-50AF-4053-B964-F981F7E0F83E}" type="datetimeFigureOut">
               <a:rPr lang="en-GB" smtClean="0"/>
-              <a:t>03/01/2026</a:t>
+              <a:t>04/01/2026</a:t>
             </a:fld>
             <a:endParaRPr lang="en-GB"/>
           </a:p>
@@ -907,13 +2772,13 @@
   <p:clrMapOvr>
     <a:masterClrMapping/>
   </p:clrMapOvr>
-  <mc:AlternateContent xmlns:mc="http://schemas.openxmlformats.org/markup-compatibility/2006">
-    <mc:Choice xmlns:p159="http://schemas.microsoft.com/office/powerpoint/2015/09/main" Requires="p159">
+  <mc:AlternateContent xmlns:mc="http://schemas.openxmlformats.org/markup-compatibility/2006" xmlns:p159="http://schemas.microsoft.com/office/powerpoint/2015/09/main">
+    <mc:Choice Requires="p159">
       <p:transition xmlns:p14="http://schemas.microsoft.com/office/powerpoint/2010/main" spd="slow" p14:dur="2000">
         <p159:morph option="byObject"/>
       </p:transition>
     </mc:Choice>
-    <mc:Fallback>
+    <mc:Fallback xmlns="">
       <p:transition spd="slow">
         <p:fade/>
       </p:transition>
@@ -1049,7 +2914,7 @@
           <a:p>
             <a:fld id="{BFF902D8-50AF-4053-B964-F981F7E0F83E}" type="datetimeFigureOut">
               <a:rPr lang="en-GB" smtClean="0"/>
-              <a:t>03/01/2026</a:t>
+              <a:t>04/01/2026</a:t>
             </a:fld>
             <a:endParaRPr lang="en-GB"/>
           </a:p>
@@ -1119,13 +2984,13 @@
   <p:clrMapOvr>
     <a:masterClrMapping/>
   </p:clrMapOvr>
-  <mc:AlternateContent xmlns:mc="http://schemas.openxmlformats.org/markup-compatibility/2006">
-    <mc:Choice xmlns:p159="http://schemas.microsoft.com/office/powerpoint/2015/09/main" Requires="p159">
+  <mc:AlternateContent xmlns:mc="http://schemas.openxmlformats.org/markup-compatibility/2006" xmlns:p159="http://schemas.microsoft.com/office/powerpoint/2015/09/main">
+    <mc:Choice Requires="p159">
       <p:transition xmlns:p14="http://schemas.microsoft.com/office/powerpoint/2010/main" spd="slow" p14:dur="2000">
         <p159:morph option="byObject"/>
       </p:transition>
     </mc:Choice>
-    <mc:Fallback>
+    <mc:Fallback xmlns="">
       <p:transition spd="slow">
         <p:fade/>
       </p:transition>
@@ -1271,7 +3136,7 @@
           <a:p>
             <a:fld id="{BFF902D8-50AF-4053-B964-F981F7E0F83E}" type="datetimeFigureOut">
               <a:rPr lang="en-GB" smtClean="0"/>
-              <a:t>03/01/2026</a:t>
+              <a:t>04/01/2026</a:t>
             </a:fld>
             <a:endParaRPr lang="en-GB"/>
           </a:p>
@@ -1341,13 +3206,13 @@
   <p:clrMapOvr>
     <a:masterClrMapping/>
   </p:clrMapOvr>
-  <mc:AlternateContent xmlns:mc="http://schemas.openxmlformats.org/markup-compatibility/2006">
-    <mc:Choice xmlns:p159="http://schemas.microsoft.com/office/powerpoint/2015/09/main" Requires="p159">
+  <mc:AlternateContent xmlns:mc="http://schemas.openxmlformats.org/markup-compatibility/2006" xmlns:p159="http://schemas.microsoft.com/office/powerpoint/2015/09/main">
+    <mc:Choice Requires="p159">
       <p:transition xmlns:p14="http://schemas.microsoft.com/office/powerpoint/2010/main" spd="slow" p14:dur="2000">
         <p159:morph option="byObject"/>
       </p:transition>
     </mc:Choice>
-    <mc:Fallback>
+    <mc:Fallback xmlns="">
       <p:transition spd="slow">
         <p:fade/>
       </p:transition>
@@ -1483,7 +3348,7 @@
           <a:p>
             <a:fld id="{BFF902D8-50AF-4053-B964-F981F7E0F83E}" type="datetimeFigureOut">
               <a:rPr lang="en-GB" smtClean="0"/>
-              <a:t>03/01/2026</a:t>
+              <a:t>04/01/2026</a:t>
             </a:fld>
             <a:endParaRPr lang="en-GB"/>
           </a:p>
@@ -1553,13 +3418,13 @@
   <p:clrMapOvr>
     <a:masterClrMapping/>
   </p:clrMapOvr>
-  <mc:AlternateContent xmlns:mc="http://schemas.openxmlformats.org/markup-compatibility/2006">
-    <mc:Choice xmlns:p159="http://schemas.microsoft.com/office/powerpoint/2015/09/main" Requires="p159">
+  <mc:AlternateContent xmlns:mc="http://schemas.openxmlformats.org/markup-compatibility/2006" xmlns:p159="http://schemas.microsoft.com/office/powerpoint/2015/09/main">
+    <mc:Choice Requires="p159">
       <p:transition xmlns:p14="http://schemas.microsoft.com/office/powerpoint/2010/main" spd="slow" p14:dur="2000">
         <p159:morph option="byObject"/>
       </p:transition>
     </mc:Choice>
-    <mc:Fallback>
+    <mc:Fallback xmlns="">
       <p:transition spd="slow">
         <p:fade/>
       </p:transition>
@@ -1771,7 +3636,7 @@
           <a:p>
             <a:fld id="{BFF902D8-50AF-4053-B964-F981F7E0F83E}" type="datetimeFigureOut">
               <a:rPr lang="en-GB" smtClean="0"/>
-              <a:t>03/01/2026</a:t>
+              <a:t>04/01/2026</a:t>
             </a:fld>
             <a:endParaRPr lang="en-GB"/>
           </a:p>
@@ -1841,13 +3706,13 @@
   <p:clrMapOvr>
     <a:masterClrMapping/>
   </p:clrMapOvr>
-  <mc:AlternateContent xmlns:mc="http://schemas.openxmlformats.org/markup-compatibility/2006">
-    <mc:Choice xmlns:p159="http://schemas.microsoft.com/office/powerpoint/2015/09/main" Requires="p159">
+  <mc:AlternateContent xmlns:mc="http://schemas.openxmlformats.org/markup-compatibility/2006" xmlns:p159="http://schemas.microsoft.com/office/powerpoint/2015/09/main">
+    <mc:Choice Requires="p159">
       <p:transition xmlns:p14="http://schemas.microsoft.com/office/powerpoint/2010/main" spd="slow" p14:dur="2000">
         <p159:morph option="byObject"/>
       </p:transition>
     </mc:Choice>
-    <mc:Fallback>
+    <mc:Fallback xmlns="">
       <p:transition spd="slow">
         <p:fade/>
       </p:transition>
@@ -2051,7 +3916,7 @@
           <a:p>
             <a:fld id="{BFF902D8-50AF-4053-B964-F981F7E0F83E}" type="datetimeFigureOut">
               <a:rPr lang="en-GB" smtClean="0"/>
-              <a:t>03/01/2026</a:t>
+              <a:t>04/01/2026</a:t>
             </a:fld>
             <a:endParaRPr lang="en-GB"/>
           </a:p>
@@ -2121,13 +3986,13 @@
   <p:clrMapOvr>
     <a:masterClrMapping/>
   </p:clrMapOvr>
-  <mc:AlternateContent xmlns:mc="http://schemas.openxmlformats.org/markup-compatibility/2006">
-    <mc:Choice xmlns:p159="http://schemas.microsoft.com/office/powerpoint/2015/09/main" Requires="p159">
+  <mc:AlternateContent xmlns:mc="http://schemas.openxmlformats.org/markup-compatibility/2006" xmlns:p159="http://schemas.microsoft.com/office/powerpoint/2015/09/main">
+    <mc:Choice Requires="p159">
       <p:transition xmlns:p14="http://schemas.microsoft.com/office/powerpoint/2010/main" spd="slow" p14:dur="2000">
         <p159:morph option="byObject"/>
       </p:transition>
     </mc:Choice>
-    <mc:Fallback>
+    <mc:Fallback xmlns="">
       <p:transition spd="slow">
         <p:fade/>
       </p:transition>
@@ -2478,7 +4343,7 @@
           <a:p>
             <a:fld id="{BFF902D8-50AF-4053-B964-F981F7E0F83E}" type="datetimeFigureOut">
               <a:rPr lang="en-GB" smtClean="0"/>
-              <a:t>03/01/2026</a:t>
+              <a:t>04/01/2026</a:t>
             </a:fld>
             <a:endParaRPr lang="en-GB"/>
           </a:p>
@@ -2548,13 +4413,13 @@
   <p:clrMapOvr>
     <a:masterClrMapping/>
   </p:clrMapOvr>
-  <mc:AlternateContent xmlns:mc="http://schemas.openxmlformats.org/markup-compatibility/2006">
-    <mc:Choice xmlns:p159="http://schemas.microsoft.com/office/powerpoint/2015/09/main" Requires="p159">
+  <mc:AlternateContent xmlns:mc="http://schemas.openxmlformats.org/markup-compatibility/2006" xmlns:p159="http://schemas.microsoft.com/office/powerpoint/2015/09/main">
+    <mc:Choice Requires="p159">
       <p:transition xmlns:p14="http://schemas.microsoft.com/office/powerpoint/2010/main" spd="slow" p14:dur="2000">
         <p159:morph option="byObject"/>
       </p:transition>
     </mc:Choice>
-    <mc:Fallback>
+    <mc:Fallback xmlns="">
       <p:transition spd="slow">
         <p:fade/>
       </p:transition>
@@ -2632,7 +4497,7 @@
           <a:p>
             <a:fld id="{BFF902D8-50AF-4053-B964-F981F7E0F83E}" type="datetimeFigureOut">
               <a:rPr lang="en-GB" smtClean="0"/>
-              <a:t>03/01/2026</a:t>
+              <a:t>04/01/2026</a:t>
             </a:fld>
             <a:endParaRPr lang="en-GB"/>
           </a:p>
@@ -2702,13 +4567,13 @@
   <p:clrMapOvr>
     <a:masterClrMapping/>
   </p:clrMapOvr>
-  <mc:AlternateContent xmlns:mc="http://schemas.openxmlformats.org/markup-compatibility/2006">
-    <mc:Choice xmlns:p159="http://schemas.microsoft.com/office/powerpoint/2015/09/main" Requires="p159">
+  <mc:AlternateContent xmlns:mc="http://schemas.openxmlformats.org/markup-compatibility/2006" xmlns:p159="http://schemas.microsoft.com/office/powerpoint/2015/09/main">
+    <mc:Choice Requires="p159">
       <p:transition xmlns:p14="http://schemas.microsoft.com/office/powerpoint/2010/main" spd="slow" p14:dur="2000">
         <p159:morph option="byObject"/>
       </p:transition>
     </mc:Choice>
-    <mc:Fallback>
+    <mc:Fallback xmlns="">
       <p:transition spd="slow">
         <p:fade/>
       </p:transition>
@@ -2757,7 +4622,7 @@
           <a:p>
             <a:fld id="{BFF902D8-50AF-4053-B964-F981F7E0F83E}" type="datetimeFigureOut">
               <a:rPr lang="en-GB" smtClean="0"/>
-              <a:t>03/01/2026</a:t>
+              <a:t>04/01/2026</a:t>
             </a:fld>
             <a:endParaRPr lang="en-GB"/>
           </a:p>
@@ -2827,13 +4692,13 @@
   <p:clrMapOvr>
     <a:masterClrMapping/>
   </p:clrMapOvr>
-  <mc:AlternateContent xmlns:mc="http://schemas.openxmlformats.org/markup-compatibility/2006">
-    <mc:Choice xmlns:p159="http://schemas.microsoft.com/office/powerpoint/2015/09/main" Requires="p159">
+  <mc:AlternateContent xmlns:mc="http://schemas.openxmlformats.org/markup-compatibility/2006" xmlns:p159="http://schemas.microsoft.com/office/powerpoint/2015/09/main">
+    <mc:Choice Requires="p159">
       <p:transition xmlns:p14="http://schemas.microsoft.com/office/powerpoint/2010/main" spd="slow" p14:dur="2000">
         <p159:morph option="byObject"/>
       </p:transition>
     </mc:Choice>
-    <mc:Fallback>
+    <mc:Fallback xmlns="">
       <p:transition spd="slow">
         <p:fade/>
       </p:transition>
@@ -3082,7 +4947,7 @@
           <a:p>
             <a:fld id="{BFF902D8-50AF-4053-B964-F981F7E0F83E}" type="datetimeFigureOut">
               <a:rPr lang="en-GB" smtClean="0"/>
-              <a:t>03/01/2026</a:t>
+              <a:t>04/01/2026</a:t>
             </a:fld>
             <a:endParaRPr lang="en-GB"/>
           </a:p>
@@ -3152,13 +5017,13 @@
   <p:clrMapOvr>
     <a:masterClrMapping/>
   </p:clrMapOvr>
-  <mc:AlternateContent xmlns:mc="http://schemas.openxmlformats.org/markup-compatibility/2006">
-    <mc:Choice xmlns:p159="http://schemas.microsoft.com/office/powerpoint/2015/09/main" Requires="p159">
+  <mc:AlternateContent xmlns:mc="http://schemas.openxmlformats.org/markup-compatibility/2006" xmlns:p159="http://schemas.microsoft.com/office/powerpoint/2015/09/main">
+    <mc:Choice Requires="p159">
       <p:transition xmlns:p14="http://schemas.microsoft.com/office/powerpoint/2010/main" spd="slow" p14:dur="2000">
         <p159:morph option="byObject"/>
       </p:transition>
     </mc:Choice>
-    <mc:Fallback>
+    <mc:Fallback xmlns="">
       <p:transition spd="slow">
         <p:fade/>
       </p:transition>
@@ -3383,7 +5248,7 @@
           <a:p>
             <a:fld id="{BFF902D8-50AF-4053-B964-F981F7E0F83E}" type="datetimeFigureOut">
               <a:rPr lang="en-GB" smtClean="0"/>
-              <a:t>03/01/2026</a:t>
+              <a:t>04/01/2026</a:t>
             </a:fld>
             <a:endParaRPr lang="en-GB"/>
           </a:p>
@@ -3453,13 +5318,13 @@
   <p:clrMapOvr>
     <a:masterClrMapping/>
   </p:clrMapOvr>
-  <mc:AlternateContent xmlns:mc="http://schemas.openxmlformats.org/markup-compatibility/2006">
-    <mc:Choice xmlns:p159="http://schemas.microsoft.com/office/powerpoint/2015/09/main" Requires="p159">
+  <mc:AlternateContent xmlns:mc="http://schemas.openxmlformats.org/markup-compatibility/2006" xmlns:p159="http://schemas.microsoft.com/office/powerpoint/2015/09/main">
+    <mc:Choice Requires="p159">
       <p:transition xmlns:p14="http://schemas.microsoft.com/office/powerpoint/2010/main" spd="slow" p14:dur="2000">
         <p159:morph option="byObject"/>
       </p:transition>
     </mc:Choice>
-    <mc:Fallback>
+    <mc:Fallback xmlns="">
       <p:transition spd="slow">
         <p:fade/>
       </p:transition>
@@ -3663,7 +5528,7 @@
           <a:p>
             <a:fld id="{BFF902D8-50AF-4053-B964-F981F7E0F83E}" type="datetimeFigureOut">
               <a:rPr lang="en-GB" smtClean="0"/>
-              <a:t>03/01/2026</a:t>
+              <a:t>04/01/2026</a:t>
             </a:fld>
             <a:endParaRPr lang="en-GB"/>
           </a:p>
@@ -3780,13 +5645,13 @@
     <p:sldLayoutId id="2147483658" r:id="rId10"/>
     <p:sldLayoutId id="2147483659" r:id="rId11"/>
   </p:sldLayoutIdLst>
-  <mc:AlternateContent xmlns:mc="http://schemas.openxmlformats.org/markup-compatibility/2006">
-    <mc:Choice xmlns:p159="http://schemas.microsoft.com/office/powerpoint/2015/09/main" Requires="p159">
+  <mc:AlternateContent xmlns:mc="http://schemas.openxmlformats.org/markup-compatibility/2006" xmlns:p159="http://schemas.microsoft.com/office/powerpoint/2015/09/main">
+    <mc:Choice Requires="p159">
       <p:transition xmlns:p14="http://schemas.microsoft.com/office/powerpoint/2010/main" spd="slow" p14:dur="2000">
         <p159:morph option="byObject"/>
       </p:transition>
     </mc:Choice>
-    <mc:Fallback>
+    <mc:Fallback xmlns="">
       <p:transition spd="slow">
         <p:fade/>
       </p:transition>
@@ -4468,13 +6333,13 @@
   <p:clrMapOvr>
     <a:masterClrMapping/>
   </p:clrMapOvr>
-  <mc:AlternateContent xmlns:mc="http://schemas.openxmlformats.org/markup-compatibility/2006">
-    <mc:Choice xmlns:p159="http://schemas.microsoft.com/office/powerpoint/2015/09/main" Requires="p159">
+  <mc:AlternateContent xmlns:mc="http://schemas.openxmlformats.org/markup-compatibility/2006" xmlns:p159="http://schemas.microsoft.com/office/powerpoint/2015/09/main">
+    <mc:Choice Requires="p159">
       <p:transition xmlns:p14="http://schemas.microsoft.com/office/powerpoint/2010/main" spd="slow" p14:dur="2000">
         <p159:morph option="byObject"/>
       </p:transition>
     </mc:Choice>
-    <mc:Fallback>
+    <mc:Fallback xmlns="">
       <p:transition spd="slow">
         <p:fade/>
       </p:transition>
@@ -5435,13 +7300,13 @@
   <p:clrMapOvr>
     <a:masterClrMapping/>
   </p:clrMapOvr>
-  <mc:AlternateContent xmlns:mc="http://schemas.openxmlformats.org/markup-compatibility/2006">
-    <mc:Choice xmlns:p159="http://schemas.microsoft.com/office/powerpoint/2015/09/main" Requires="p159">
+  <mc:AlternateContent xmlns:mc="http://schemas.openxmlformats.org/markup-compatibility/2006" xmlns:p159="http://schemas.microsoft.com/office/powerpoint/2015/09/main">
+    <mc:Choice Requires="p159">
       <p:transition xmlns:p14="http://schemas.microsoft.com/office/powerpoint/2010/main" spd="slow" p14:dur="2000">
         <p159:morph option="byObject"/>
       </p:transition>
     </mc:Choice>
-    <mc:Fallback>
+    <mc:Fallback xmlns="">
       <p:transition spd="slow">
         <p:fade/>
       </p:transition>
@@ -5638,7 +7503,7 @@
         </p:blipFill>
         <p:spPr>
           <a:xfrm>
-            <a:off x="2968670" y="-327668"/>
+            <a:off x="2980100" y="-327668"/>
             <a:ext cx="12288228" cy="9212383"/>
           </a:xfrm>
           <a:prstGeom prst="rect">
@@ -6187,42 +8052,66 @@
           </a:prstGeom>
         </p:spPr>
       </p:pic>
-      <p:pic>
-        <p:nvPicPr>
-          <p:cNvPr id="17" name="Picture 16">
-            <a:extLst>
-              <a:ext uri="{FF2B5EF4-FFF2-40B4-BE49-F238E27FC236}">
-                <a16:creationId xmlns:a16="http://schemas.microsoft.com/office/drawing/2014/main" id="{329A1D86-5F7B-FD62-4668-65160E31167E}"/>
-              </a:ext>
-            </a:extLst>
-          </p:cNvPr>
-          <p:cNvPicPr>
-            <a:picLocks noChangeAspect="1"/>
-          </p:cNvPicPr>
-          <p:nvPr/>
-        </p:nvPicPr>
-        <p:blipFill>
-          <a:blip r:embed="rId12">
-            <a:extLst>
-              <a:ext uri="{28A0092B-C50C-407E-A947-70E740481C1C}">
-                <a14:useLocalDpi xmlns:a14="http://schemas.microsoft.com/office/drawing/2010/main" val="0"/>
-              </a:ext>
-            </a:extLst>
-          </a:blip>
-          <a:stretch>
-            <a:fillRect/>
-          </a:stretch>
-        </p:blipFill>
-        <p:spPr>
-          <a:xfrm>
-            <a:off x="5861030" y="3525732"/>
-            <a:ext cx="5029364" cy="3001556"/>
-          </a:xfrm>
-          <a:prstGeom prst="rect">
-            <a:avLst/>
-          </a:prstGeom>
-        </p:spPr>
-      </p:pic>
+      <p:graphicFrame>
+        <p:nvGraphicFramePr>
+          <p:cNvPr id="2" name="Chart 1">
+            <a:extLst>
+              <a:ext uri="{FF2B5EF4-FFF2-40B4-BE49-F238E27FC236}">
+                <a16:creationId xmlns:a16="http://schemas.microsoft.com/office/drawing/2014/main" id="{C1AF1948-9315-5E99-8ACC-6128C741FCC3}"/>
+              </a:ext>
+            </a:extLst>
+          </p:cNvPr>
+          <p:cNvGraphicFramePr>
+            <a:graphicFrameLocks/>
+          </p:cNvGraphicFramePr>
+          <p:nvPr>
+            <p:extLst>
+              <p:ext uri="{D42A27DB-BD31-4B8C-83A1-F6EECF244321}">
+                <p14:modId xmlns:p14="http://schemas.microsoft.com/office/powerpoint/2010/main" val="3791856645"/>
+              </p:ext>
+            </p:extLst>
+          </p:nvPr>
+        </p:nvGraphicFramePr>
+        <p:xfrm>
+          <a:off x="5038050" y="3852677"/>
+          <a:ext cx="2940050" cy="2092324"/>
+        </p:xfrm>
+        <a:graphic>
+          <a:graphicData uri="http://schemas.openxmlformats.org/drawingml/2006/chart">
+            <c:chart xmlns:c="http://schemas.openxmlformats.org/drawingml/2006/chart" xmlns:r="http://schemas.openxmlformats.org/officeDocument/2006/relationships" r:id="rId12"/>
+          </a:graphicData>
+        </a:graphic>
+      </p:graphicFrame>
+      <p:graphicFrame>
+        <p:nvGraphicFramePr>
+          <p:cNvPr id="4" name="Chart 3">
+            <a:extLst>
+              <a:ext uri="{FF2B5EF4-FFF2-40B4-BE49-F238E27FC236}">
+                <a16:creationId xmlns:a16="http://schemas.microsoft.com/office/drawing/2014/main" id="{E98EA4FD-A54B-43B9-AD91-5C26BE0B9E9E}"/>
+              </a:ext>
+            </a:extLst>
+          </p:cNvPr>
+          <p:cNvGraphicFramePr>
+            <a:graphicFrameLocks/>
+          </p:cNvGraphicFramePr>
+          <p:nvPr>
+            <p:extLst>
+              <p:ext uri="{D42A27DB-BD31-4B8C-83A1-F6EECF244321}">
+                <p14:modId xmlns:p14="http://schemas.microsoft.com/office/powerpoint/2010/main" val="555521912"/>
+              </p:ext>
+            </p:extLst>
+          </p:nvPr>
+        </p:nvGraphicFramePr>
+        <p:xfrm>
+          <a:off x="8224422" y="3821304"/>
+          <a:ext cx="3590925" cy="1933575"/>
+        </p:xfrm>
+        <a:graphic>
+          <a:graphicData uri="http://schemas.openxmlformats.org/drawingml/2006/chart">
+            <c:chart xmlns:c="http://schemas.openxmlformats.org/drawingml/2006/chart" xmlns:r="http://schemas.openxmlformats.org/officeDocument/2006/relationships" r:id="rId13"/>
+          </a:graphicData>
+        </a:graphic>
+      </p:graphicFrame>
     </p:spTree>
     <p:extLst>
       <p:ext uri="{BB962C8B-B14F-4D97-AF65-F5344CB8AC3E}">
@@ -6233,13 +8122,13 @@
   <p:clrMapOvr>
     <a:masterClrMapping/>
   </p:clrMapOvr>
-  <mc:AlternateContent xmlns:mc="http://schemas.openxmlformats.org/markup-compatibility/2006">
-    <mc:Choice xmlns:p159="http://schemas.microsoft.com/office/powerpoint/2015/09/main" Requires="p159">
+  <mc:AlternateContent xmlns:mc="http://schemas.openxmlformats.org/markup-compatibility/2006" xmlns:p159="http://schemas.microsoft.com/office/powerpoint/2015/09/main">
+    <mc:Choice Requires="p159">
       <p:transition xmlns:p14="http://schemas.microsoft.com/office/powerpoint/2010/main" spd="slow" p14:dur="2000">
         <p159:morph option="byObject"/>
       </p:transition>
     </mc:Choice>
-    <mc:Fallback>
+    <mc:Fallback xmlns="">
       <p:transition spd="slow">
         <p:fade/>
       </p:transition>
@@ -7057,13 +8946,13 @@
   <p:clrMapOvr>
     <a:masterClrMapping/>
   </p:clrMapOvr>
-  <mc:AlternateContent xmlns:mc="http://schemas.openxmlformats.org/markup-compatibility/2006">
-    <mc:Choice xmlns:p159="http://schemas.microsoft.com/office/powerpoint/2015/09/main" Requires="p159">
+  <mc:AlternateContent xmlns:mc="http://schemas.openxmlformats.org/markup-compatibility/2006" xmlns:p159="http://schemas.microsoft.com/office/powerpoint/2015/09/main">
+    <mc:Choice Requires="p159">
       <p:transition xmlns:p14="http://schemas.microsoft.com/office/powerpoint/2010/main" spd="slow" p14:dur="2000">
         <p159:morph option="byObject"/>
       </p:transition>
     </mc:Choice>
-    <mc:Fallback>
+    <mc:Fallback xmlns="">
       <p:transition spd="slow">
         <p:fade/>
       </p:transition>
@@ -7837,13 +9726,13 @@
   <p:clrMapOvr>
     <a:masterClrMapping/>
   </p:clrMapOvr>
-  <mc:AlternateContent xmlns:mc="http://schemas.openxmlformats.org/markup-compatibility/2006">
-    <mc:Choice xmlns:p159="http://schemas.microsoft.com/office/powerpoint/2015/09/main" Requires="p159">
+  <mc:AlternateContent xmlns:mc="http://schemas.openxmlformats.org/markup-compatibility/2006" xmlns:p159="http://schemas.microsoft.com/office/powerpoint/2015/09/main">
+    <mc:Choice Requires="p159">
       <p:transition xmlns:p14="http://schemas.microsoft.com/office/powerpoint/2010/main" spd="slow" p14:dur="2000">
         <p159:morph option="byObject"/>
       </p:transition>
     </mc:Choice>
-    <mc:Fallback>
+    <mc:Fallback xmlns="">
       <p:transition spd="slow">
         <p:fade/>
       </p:transition>
@@ -8477,13 +10366,13 @@
   <p:clrMapOvr>
     <a:masterClrMapping/>
   </p:clrMapOvr>
-  <mc:AlternateContent xmlns:mc="http://schemas.openxmlformats.org/markup-compatibility/2006">
-    <mc:Choice xmlns:p159="http://schemas.microsoft.com/office/powerpoint/2015/09/main" Requires="p159">
+  <mc:AlternateContent xmlns:mc="http://schemas.openxmlformats.org/markup-compatibility/2006" xmlns:p159="http://schemas.microsoft.com/office/powerpoint/2015/09/main">
+    <mc:Choice Requires="p159">
       <p:transition xmlns:p14="http://schemas.microsoft.com/office/powerpoint/2010/main" spd="slow" p14:dur="2000">
         <p159:morph option="byObject"/>
       </p:transition>
     </mc:Choice>
-    <mc:Fallback>
+    <mc:Fallback xmlns="">
       <p:transition spd="slow">
         <p:fade/>
       </p:transition>
@@ -9216,13 +11105,13 @@
   <p:clrMapOvr>
     <a:masterClrMapping/>
   </p:clrMapOvr>
-  <mc:AlternateContent xmlns:mc="http://schemas.openxmlformats.org/markup-compatibility/2006">
-    <mc:Choice xmlns:p159="http://schemas.microsoft.com/office/powerpoint/2015/09/main" Requires="p159">
+  <mc:AlternateContent xmlns:mc="http://schemas.openxmlformats.org/markup-compatibility/2006" xmlns:p159="http://schemas.microsoft.com/office/powerpoint/2015/09/main">
+    <mc:Choice Requires="p159">
       <p:transition xmlns:p14="http://schemas.microsoft.com/office/powerpoint/2010/main" spd="slow" p14:dur="2000">
         <p159:morph option="byObject"/>
       </p:transition>
     </mc:Choice>
-    <mc:Fallback>
+    <mc:Fallback xmlns="">
       <p:transition spd="slow">
         <p:fade/>
       </p:transition>
@@ -10005,13 +11894,13 @@
   <p:clrMapOvr>
     <a:masterClrMapping/>
   </p:clrMapOvr>
-  <mc:AlternateContent xmlns:mc="http://schemas.openxmlformats.org/markup-compatibility/2006">
-    <mc:Choice xmlns:p159="http://schemas.microsoft.com/office/powerpoint/2015/09/main" Requires="p159">
+  <mc:AlternateContent xmlns:mc="http://schemas.openxmlformats.org/markup-compatibility/2006" xmlns:p159="http://schemas.microsoft.com/office/powerpoint/2015/09/main">
+    <mc:Choice Requires="p159">
       <p:transition xmlns:p14="http://schemas.microsoft.com/office/powerpoint/2010/main" spd="slow" p14:dur="2000">
         <p159:morph option="byObject"/>
       </p:transition>
     </mc:Choice>
-    <mc:Fallback>
+    <mc:Fallback xmlns="">
       <p:transition spd="slow">
         <p:fade/>
       </p:transition>
@@ -10750,13 +12639,13 @@
   <p:clrMapOvr>
     <a:masterClrMapping/>
   </p:clrMapOvr>
-  <mc:AlternateContent xmlns:mc="http://schemas.openxmlformats.org/markup-compatibility/2006">
-    <mc:Choice xmlns:p159="http://schemas.microsoft.com/office/powerpoint/2015/09/main" Requires="p159">
+  <mc:AlternateContent xmlns:mc="http://schemas.openxmlformats.org/markup-compatibility/2006" xmlns:p159="http://schemas.microsoft.com/office/powerpoint/2015/09/main">
+    <mc:Choice Requires="p159">
       <p:transition xmlns:p14="http://schemas.microsoft.com/office/powerpoint/2010/main" spd="slow" p14:dur="2000">
         <p159:morph option="byObject"/>
       </p:transition>
     </mc:Choice>
-    <mc:Fallback>
+    <mc:Fallback xmlns="">
       <p:transition spd="slow">
         <p:fade/>
       </p:transition>
@@ -10936,13 +12825,13 @@
   <p:clrMapOvr>
     <a:masterClrMapping/>
   </p:clrMapOvr>
-  <mc:AlternateContent xmlns:mc="http://schemas.openxmlformats.org/markup-compatibility/2006">
-    <mc:Choice xmlns:p159="http://schemas.microsoft.com/office/powerpoint/2015/09/main" Requires="p159">
+  <mc:AlternateContent xmlns:mc="http://schemas.openxmlformats.org/markup-compatibility/2006" xmlns:p159="http://schemas.microsoft.com/office/powerpoint/2015/09/main">
+    <mc:Choice Requires="p159">
       <p:transition xmlns:p14="http://schemas.microsoft.com/office/powerpoint/2010/main" spd="slow" p14:dur="2000">
         <p159:morph option="byObject"/>
       </p:transition>
     </mc:Choice>
-    <mc:Fallback>
+    <mc:Fallback xmlns="">
       <p:transition spd="slow">
         <p:fade/>
       </p:transition>
@@ -11367,7 +13256,7 @@
                 <a:latin typeface="Times New Roman" panose="02020603050405020304" pitchFamily="18" charset="0"/>
                 <a:cs typeface="Times New Roman" panose="02020603050405020304" pitchFamily="18" charset="0"/>
               </a:rPr>
-              <a:t>DEC-3/2026</a:t>
+              <a:t>Jan-5/2026</a:t>
             </a:r>
           </a:p>
           <a:p>
@@ -11416,13 +13305,13 @@
   <p:clrMapOvr>
     <a:masterClrMapping/>
   </p:clrMapOvr>
-  <mc:AlternateContent xmlns:mc="http://schemas.openxmlformats.org/markup-compatibility/2006">
-    <mc:Choice xmlns:p159="http://schemas.microsoft.com/office/powerpoint/2015/09/main" Requires="p159">
+  <mc:AlternateContent xmlns:mc="http://schemas.openxmlformats.org/markup-compatibility/2006" xmlns:p159="http://schemas.microsoft.com/office/powerpoint/2015/09/main">
+    <mc:Choice Requires="p159">
       <p:transition xmlns:p14="http://schemas.microsoft.com/office/powerpoint/2010/main" spd="slow" p14:dur="2000">
         <p159:morph option="byObject"/>
       </p:transition>
     </mc:Choice>
-    <mc:Fallback>
+    <mc:Fallback xmlns="">
       <p:transition spd="slow">
         <p:fade/>
       </p:transition>
@@ -12060,13 +13949,13 @@
   <p:clrMapOvr>
     <a:masterClrMapping/>
   </p:clrMapOvr>
-  <mc:AlternateContent xmlns:mc="http://schemas.openxmlformats.org/markup-compatibility/2006">
-    <mc:Choice xmlns:p159="http://schemas.microsoft.com/office/powerpoint/2015/09/main" Requires="p159">
+  <mc:AlternateContent xmlns:mc="http://schemas.openxmlformats.org/markup-compatibility/2006" xmlns:p159="http://schemas.microsoft.com/office/powerpoint/2015/09/main">
+    <mc:Choice Requires="p159">
       <p:transition xmlns:p14="http://schemas.microsoft.com/office/powerpoint/2010/main" spd="slow" p14:dur="2000">
         <p159:morph option="byObject"/>
       </p:transition>
     </mc:Choice>
-    <mc:Fallback>
+    <mc:Fallback xmlns="">
       <p:transition spd="slow">
         <p:fade/>
       </p:transition>
@@ -13243,13 +15132,13 @@
   <p:clrMapOvr>
     <a:masterClrMapping/>
   </p:clrMapOvr>
-  <mc:AlternateContent xmlns:mc="http://schemas.openxmlformats.org/markup-compatibility/2006">
-    <mc:Choice xmlns:p159="http://schemas.microsoft.com/office/powerpoint/2015/09/main" Requires="p159">
+  <mc:AlternateContent xmlns:mc="http://schemas.openxmlformats.org/markup-compatibility/2006" xmlns:p159="http://schemas.microsoft.com/office/powerpoint/2015/09/main">
+    <mc:Choice Requires="p159">
       <p:transition xmlns:p14="http://schemas.microsoft.com/office/powerpoint/2010/main" spd="slow" p14:dur="2000">
         <p159:morph option="byObject"/>
       </p:transition>
     </mc:Choice>
-    <mc:Fallback>
+    <mc:Fallback xmlns="">
       <p:transition spd="slow">
         <p:fade/>
       </p:transition>
@@ -14207,13 +16096,13 @@
   <p:clrMapOvr>
     <a:masterClrMapping/>
   </p:clrMapOvr>
-  <mc:AlternateContent xmlns:mc="http://schemas.openxmlformats.org/markup-compatibility/2006">
-    <mc:Choice xmlns:p159="http://schemas.microsoft.com/office/powerpoint/2015/09/main" Requires="p159">
+  <mc:AlternateContent xmlns:mc="http://schemas.openxmlformats.org/markup-compatibility/2006" xmlns:p159="http://schemas.microsoft.com/office/powerpoint/2015/09/main">
+    <mc:Choice Requires="p159">
       <p:transition xmlns:p14="http://schemas.microsoft.com/office/powerpoint/2010/main" spd="slow" p14:dur="2000">
         <p159:morph option="byObject"/>
       </p:transition>
     </mc:Choice>
-    <mc:Fallback>
+    <mc:Fallback xmlns="">
       <p:transition spd="slow">
         <p:fade/>
       </p:transition>
@@ -15116,13 +17005,13 @@
   <p:clrMapOvr>
     <a:masterClrMapping/>
   </p:clrMapOvr>
-  <mc:AlternateContent xmlns:mc="http://schemas.openxmlformats.org/markup-compatibility/2006">
-    <mc:Choice xmlns:p159="http://schemas.microsoft.com/office/powerpoint/2015/09/main" Requires="p159">
+  <mc:AlternateContent xmlns:mc="http://schemas.openxmlformats.org/markup-compatibility/2006" xmlns:p159="http://schemas.microsoft.com/office/powerpoint/2015/09/main">
+    <mc:Choice Requires="p159">
       <p:transition xmlns:p14="http://schemas.microsoft.com/office/powerpoint/2010/main" spd="slow" p14:dur="2000">
         <p159:morph option="byObject"/>
       </p:transition>
     </mc:Choice>
-    <mc:Fallback>
+    <mc:Fallback xmlns="">
       <p:transition spd="slow">
         <p:fade/>
       </p:transition>
@@ -15978,13 +17867,13 @@
   <p:clrMapOvr>
     <a:masterClrMapping/>
   </p:clrMapOvr>
-  <mc:AlternateContent xmlns:mc="http://schemas.openxmlformats.org/markup-compatibility/2006">
-    <mc:Choice xmlns:p159="http://schemas.microsoft.com/office/powerpoint/2015/09/main" Requires="p159">
+  <mc:AlternateContent xmlns:mc="http://schemas.openxmlformats.org/markup-compatibility/2006" xmlns:p159="http://schemas.microsoft.com/office/powerpoint/2015/09/main">
+    <mc:Choice Requires="p159">
       <p:transition xmlns:p14="http://schemas.microsoft.com/office/powerpoint/2010/main" spd="slow" p14:dur="2000">
         <p159:morph option="byObject"/>
       </p:transition>
     </mc:Choice>
-    <mc:Fallback>
+    <mc:Fallback xmlns="">
       <p:transition spd="slow">
         <p:fade/>
       </p:transition>
@@ -16628,13 +18517,13 @@
   <p:clrMapOvr>
     <a:masterClrMapping/>
   </p:clrMapOvr>
-  <mc:AlternateContent xmlns:mc="http://schemas.openxmlformats.org/markup-compatibility/2006">
-    <mc:Choice xmlns:p159="http://schemas.microsoft.com/office/powerpoint/2015/09/main" Requires="p159">
+  <mc:AlternateContent xmlns:mc="http://schemas.openxmlformats.org/markup-compatibility/2006" xmlns:p159="http://schemas.microsoft.com/office/powerpoint/2015/09/main">
+    <mc:Choice Requires="p159">
       <p:transition xmlns:p14="http://schemas.microsoft.com/office/powerpoint/2010/main" spd="slow" p14:dur="2000">
         <p159:morph option="byObject"/>
       </p:transition>
     </mc:Choice>
-    <mc:Fallback>
+    <mc:Fallback xmlns="">
       <p:transition spd="slow">
         <p:fade/>
       </p:transition>
@@ -17567,13 +19456,13 @@
   <p:clrMapOvr>
     <a:masterClrMapping/>
   </p:clrMapOvr>
-  <mc:AlternateContent xmlns:mc="http://schemas.openxmlformats.org/markup-compatibility/2006">
-    <mc:Choice xmlns:p159="http://schemas.microsoft.com/office/powerpoint/2015/09/main" Requires="p159">
+  <mc:AlternateContent xmlns:mc="http://schemas.openxmlformats.org/markup-compatibility/2006" xmlns:p159="http://schemas.microsoft.com/office/powerpoint/2015/09/main">
+    <mc:Choice Requires="p159">
       <p:transition xmlns:p14="http://schemas.microsoft.com/office/powerpoint/2010/main" spd="slow" p14:dur="2000">
         <p159:morph option="byObject"/>
       </p:transition>
     </mc:Choice>
-    <mc:Fallback>
+    <mc:Fallback xmlns="">
       <p:transition spd="slow">
         <p:fade/>
       </p:transition>

--- a/FINALAICTPRROJECT.ppt.pptx
+++ b/FINALAICTPRROJECT.ppt.pptx
@@ -5,7 +5,7 @@
     <p:sldMasterId id="2147483648" r:id="rId1"/>
   </p:sldMasterIdLst>
   <p:notesMasterIdLst>
-    <p:notesMasterId r:id="rId20"/>
+    <p:notesMasterId r:id="rId21"/>
   </p:notesMasterIdLst>
   <p:sldIdLst>
     <p:sldId id="256" r:id="rId2"/>
@@ -25,7 +25,8 @@
     <p:sldId id="280" r:id="rId16"/>
     <p:sldId id="281" r:id="rId17"/>
     <p:sldId id="282" r:id="rId18"/>
-    <p:sldId id="287" r:id="rId19"/>
+    <p:sldId id="288" r:id="rId19"/>
+    <p:sldId id="287" r:id="rId20"/>
   </p:sldIdLst>
   <p:sldSz cx="12192000" cy="6858000"/>
   <p:notesSz cx="6858000" cy="9144000"/>
@@ -2534,7 +2535,7 @@
           <a:p>
             <a:fld id="{41EE3700-971C-4E22-9AF5-9F3C4C92A2CD}" type="slidenum">
               <a:rPr lang="en-GB" smtClean="0"/>
-              <a:t>18</a:t>
+              <a:t>19</a:t>
             </a:fld>
             <a:endParaRPr lang="en-GB"/>
           </a:p>
@@ -2772,13 +2773,13 @@
   <p:clrMapOvr>
     <a:masterClrMapping/>
   </p:clrMapOvr>
-  <mc:AlternateContent xmlns:mc="http://schemas.openxmlformats.org/markup-compatibility/2006" xmlns:p159="http://schemas.microsoft.com/office/powerpoint/2015/09/main">
-    <mc:Choice Requires="p159">
+  <mc:AlternateContent xmlns:mc="http://schemas.openxmlformats.org/markup-compatibility/2006">
+    <mc:Choice xmlns:p159="http://schemas.microsoft.com/office/powerpoint/2015/09/main" Requires="p159">
       <p:transition xmlns:p14="http://schemas.microsoft.com/office/powerpoint/2010/main" spd="slow" p14:dur="2000">
         <p159:morph option="byObject"/>
       </p:transition>
     </mc:Choice>
-    <mc:Fallback xmlns="">
+    <mc:Fallback>
       <p:transition spd="slow">
         <p:fade/>
       </p:transition>
@@ -2984,13 +2985,13 @@
   <p:clrMapOvr>
     <a:masterClrMapping/>
   </p:clrMapOvr>
-  <mc:AlternateContent xmlns:mc="http://schemas.openxmlformats.org/markup-compatibility/2006" xmlns:p159="http://schemas.microsoft.com/office/powerpoint/2015/09/main">
-    <mc:Choice Requires="p159">
+  <mc:AlternateContent xmlns:mc="http://schemas.openxmlformats.org/markup-compatibility/2006">
+    <mc:Choice xmlns:p159="http://schemas.microsoft.com/office/powerpoint/2015/09/main" Requires="p159">
       <p:transition xmlns:p14="http://schemas.microsoft.com/office/powerpoint/2010/main" spd="slow" p14:dur="2000">
         <p159:morph option="byObject"/>
       </p:transition>
     </mc:Choice>
-    <mc:Fallback xmlns="">
+    <mc:Fallback>
       <p:transition spd="slow">
         <p:fade/>
       </p:transition>
@@ -3206,13 +3207,13 @@
   <p:clrMapOvr>
     <a:masterClrMapping/>
   </p:clrMapOvr>
-  <mc:AlternateContent xmlns:mc="http://schemas.openxmlformats.org/markup-compatibility/2006" xmlns:p159="http://schemas.microsoft.com/office/powerpoint/2015/09/main">
-    <mc:Choice Requires="p159">
+  <mc:AlternateContent xmlns:mc="http://schemas.openxmlformats.org/markup-compatibility/2006">
+    <mc:Choice xmlns:p159="http://schemas.microsoft.com/office/powerpoint/2015/09/main" Requires="p159">
       <p:transition xmlns:p14="http://schemas.microsoft.com/office/powerpoint/2010/main" spd="slow" p14:dur="2000">
         <p159:morph option="byObject"/>
       </p:transition>
     </mc:Choice>
-    <mc:Fallback xmlns="">
+    <mc:Fallback>
       <p:transition spd="slow">
         <p:fade/>
       </p:transition>
@@ -3418,13 +3419,13 @@
   <p:clrMapOvr>
     <a:masterClrMapping/>
   </p:clrMapOvr>
-  <mc:AlternateContent xmlns:mc="http://schemas.openxmlformats.org/markup-compatibility/2006" xmlns:p159="http://schemas.microsoft.com/office/powerpoint/2015/09/main">
-    <mc:Choice Requires="p159">
+  <mc:AlternateContent xmlns:mc="http://schemas.openxmlformats.org/markup-compatibility/2006">
+    <mc:Choice xmlns:p159="http://schemas.microsoft.com/office/powerpoint/2015/09/main" Requires="p159">
       <p:transition xmlns:p14="http://schemas.microsoft.com/office/powerpoint/2010/main" spd="slow" p14:dur="2000">
         <p159:morph option="byObject"/>
       </p:transition>
     </mc:Choice>
-    <mc:Fallback xmlns="">
+    <mc:Fallback>
       <p:transition spd="slow">
         <p:fade/>
       </p:transition>
@@ -3706,13 +3707,13 @@
   <p:clrMapOvr>
     <a:masterClrMapping/>
   </p:clrMapOvr>
-  <mc:AlternateContent xmlns:mc="http://schemas.openxmlformats.org/markup-compatibility/2006" xmlns:p159="http://schemas.microsoft.com/office/powerpoint/2015/09/main">
-    <mc:Choice Requires="p159">
+  <mc:AlternateContent xmlns:mc="http://schemas.openxmlformats.org/markup-compatibility/2006">
+    <mc:Choice xmlns:p159="http://schemas.microsoft.com/office/powerpoint/2015/09/main" Requires="p159">
       <p:transition xmlns:p14="http://schemas.microsoft.com/office/powerpoint/2010/main" spd="slow" p14:dur="2000">
         <p159:morph option="byObject"/>
       </p:transition>
     </mc:Choice>
-    <mc:Fallback xmlns="">
+    <mc:Fallback>
       <p:transition spd="slow">
         <p:fade/>
       </p:transition>
@@ -3986,13 +3987,13 @@
   <p:clrMapOvr>
     <a:masterClrMapping/>
   </p:clrMapOvr>
-  <mc:AlternateContent xmlns:mc="http://schemas.openxmlformats.org/markup-compatibility/2006" xmlns:p159="http://schemas.microsoft.com/office/powerpoint/2015/09/main">
-    <mc:Choice Requires="p159">
+  <mc:AlternateContent xmlns:mc="http://schemas.openxmlformats.org/markup-compatibility/2006">
+    <mc:Choice xmlns:p159="http://schemas.microsoft.com/office/powerpoint/2015/09/main" Requires="p159">
       <p:transition xmlns:p14="http://schemas.microsoft.com/office/powerpoint/2010/main" spd="slow" p14:dur="2000">
         <p159:morph option="byObject"/>
       </p:transition>
     </mc:Choice>
-    <mc:Fallback xmlns="">
+    <mc:Fallback>
       <p:transition spd="slow">
         <p:fade/>
       </p:transition>
@@ -4413,13 +4414,13 @@
   <p:clrMapOvr>
     <a:masterClrMapping/>
   </p:clrMapOvr>
-  <mc:AlternateContent xmlns:mc="http://schemas.openxmlformats.org/markup-compatibility/2006" xmlns:p159="http://schemas.microsoft.com/office/powerpoint/2015/09/main">
-    <mc:Choice Requires="p159">
+  <mc:AlternateContent xmlns:mc="http://schemas.openxmlformats.org/markup-compatibility/2006">
+    <mc:Choice xmlns:p159="http://schemas.microsoft.com/office/powerpoint/2015/09/main" Requires="p159">
       <p:transition xmlns:p14="http://schemas.microsoft.com/office/powerpoint/2010/main" spd="slow" p14:dur="2000">
         <p159:morph option="byObject"/>
       </p:transition>
     </mc:Choice>
-    <mc:Fallback xmlns="">
+    <mc:Fallback>
       <p:transition spd="slow">
         <p:fade/>
       </p:transition>
@@ -4567,13 +4568,13 @@
   <p:clrMapOvr>
     <a:masterClrMapping/>
   </p:clrMapOvr>
-  <mc:AlternateContent xmlns:mc="http://schemas.openxmlformats.org/markup-compatibility/2006" xmlns:p159="http://schemas.microsoft.com/office/powerpoint/2015/09/main">
-    <mc:Choice Requires="p159">
+  <mc:AlternateContent xmlns:mc="http://schemas.openxmlformats.org/markup-compatibility/2006">
+    <mc:Choice xmlns:p159="http://schemas.microsoft.com/office/powerpoint/2015/09/main" Requires="p159">
       <p:transition xmlns:p14="http://schemas.microsoft.com/office/powerpoint/2010/main" spd="slow" p14:dur="2000">
         <p159:morph option="byObject"/>
       </p:transition>
     </mc:Choice>
-    <mc:Fallback xmlns="">
+    <mc:Fallback>
       <p:transition spd="slow">
         <p:fade/>
       </p:transition>
@@ -4692,13 +4693,13 @@
   <p:clrMapOvr>
     <a:masterClrMapping/>
   </p:clrMapOvr>
-  <mc:AlternateContent xmlns:mc="http://schemas.openxmlformats.org/markup-compatibility/2006" xmlns:p159="http://schemas.microsoft.com/office/powerpoint/2015/09/main">
-    <mc:Choice Requires="p159">
+  <mc:AlternateContent xmlns:mc="http://schemas.openxmlformats.org/markup-compatibility/2006">
+    <mc:Choice xmlns:p159="http://schemas.microsoft.com/office/powerpoint/2015/09/main" Requires="p159">
       <p:transition xmlns:p14="http://schemas.microsoft.com/office/powerpoint/2010/main" spd="slow" p14:dur="2000">
         <p159:morph option="byObject"/>
       </p:transition>
     </mc:Choice>
-    <mc:Fallback xmlns="">
+    <mc:Fallback>
       <p:transition spd="slow">
         <p:fade/>
       </p:transition>
@@ -5017,13 +5018,13 @@
   <p:clrMapOvr>
     <a:masterClrMapping/>
   </p:clrMapOvr>
-  <mc:AlternateContent xmlns:mc="http://schemas.openxmlformats.org/markup-compatibility/2006" xmlns:p159="http://schemas.microsoft.com/office/powerpoint/2015/09/main">
-    <mc:Choice Requires="p159">
+  <mc:AlternateContent xmlns:mc="http://schemas.openxmlformats.org/markup-compatibility/2006">
+    <mc:Choice xmlns:p159="http://schemas.microsoft.com/office/powerpoint/2015/09/main" Requires="p159">
       <p:transition xmlns:p14="http://schemas.microsoft.com/office/powerpoint/2010/main" spd="slow" p14:dur="2000">
         <p159:morph option="byObject"/>
       </p:transition>
     </mc:Choice>
-    <mc:Fallback xmlns="">
+    <mc:Fallback>
       <p:transition spd="slow">
         <p:fade/>
       </p:transition>
@@ -5318,13 +5319,13 @@
   <p:clrMapOvr>
     <a:masterClrMapping/>
   </p:clrMapOvr>
-  <mc:AlternateContent xmlns:mc="http://schemas.openxmlformats.org/markup-compatibility/2006" xmlns:p159="http://schemas.microsoft.com/office/powerpoint/2015/09/main">
-    <mc:Choice Requires="p159">
+  <mc:AlternateContent xmlns:mc="http://schemas.openxmlformats.org/markup-compatibility/2006">
+    <mc:Choice xmlns:p159="http://schemas.microsoft.com/office/powerpoint/2015/09/main" Requires="p159">
       <p:transition xmlns:p14="http://schemas.microsoft.com/office/powerpoint/2010/main" spd="slow" p14:dur="2000">
         <p159:morph option="byObject"/>
       </p:transition>
     </mc:Choice>
-    <mc:Fallback xmlns="">
+    <mc:Fallback>
       <p:transition spd="slow">
         <p:fade/>
       </p:transition>
@@ -5645,13 +5646,13 @@
     <p:sldLayoutId id="2147483658" r:id="rId10"/>
     <p:sldLayoutId id="2147483659" r:id="rId11"/>
   </p:sldLayoutIdLst>
-  <mc:AlternateContent xmlns:mc="http://schemas.openxmlformats.org/markup-compatibility/2006" xmlns:p159="http://schemas.microsoft.com/office/powerpoint/2015/09/main">
-    <mc:Choice Requires="p159">
+  <mc:AlternateContent xmlns:mc="http://schemas.openxmlformats.org/markup-compatibility/2006">
+    <mc:Choice xmlns:p159="http://schemas.microsoft.com/office/powerpoint/2015/09/main" Requires="p159">
       <p:transition xmlns:p14="http://schemas.microsoft.com/office/powerpoint/2010/main" spd="slow" p14:dur="2000">
         <p159:morph option="byObject"/>
       </p:transition>
     </mc:Choice>
-    <mc:Fallback xmlns="">
+    <mc:Fallback>
       <p:transition spd="slow">
         <p:fade/>
       </p:transition>
@@ -6333,13 +6334,13 @@
   <p:clrMapOvr>
     <a:masterClrMapping/>
   </p:clrMapOvr>
-  <mc:AlternateContent xmlns:mc="http://schemas.openxmlformats.org/markup-compatibility/2006" xmlns:p159="http://schemas.microsoft.com/office/powerpoint/2015/09/main">
-    <mc:Choice Requires="p159">
+  <mc:AlternateContent xmlns:mc="http://schemas.openxmlformats.org/markup-compatibility/2006">
+    <mc:Choice xmlns:p159="http://schemas.microsoft.com/office/powerpoint/2015/09/main" Requires="p159">
       <p:transition xmlns:p14="http://schemas.microsoft.com/office/powerpoint/2010/main" spd="slow" p14:dur="2000">
         <p159:morph option="byObject"/>
       </p:transition>
     </mc:Choice>
-    <mc:Fallback xmlns="">
+    <mc:Fallback>
       <p:transition spd="slow">
         <p:fade/>
       </p:transition>
@@ -7300,13 +7301,13 @@
   <p:clrMapOvr>
     <a:masterClrMapping/>
   </p:clrMapOvr>
-  <mc:AlternateContent xmlns:mc="http://schemas.openxmlformats.org/markup-compatibility/2006" xmlns:p159="http://schemas.microsoft.com/office/powerpoint/2015/09/main">
-    <mc:Choice Requires="p159">
+  <mc:AlternateContent xmlns:mc="http://schemas.openxmlformats.org/markup-compatibility/2006">
+    <mc:Choice xmlns:p159="http://schemas.microsoft.com/office/powerpoint/2015/09/main" Requires="p159">
       <p:transition xmlns:p14="http://schemas.microsoft.com/office/powerpoint/2010/main" spd="slow" p14:dur="2000">
         <p159:morph option="byObject"/>
       </p:transition>
     </mc:Choice>
-    <mc:Fallback xmlns="">
+    <mc:Fallback>
       <p:transition spd="slow">
         <p:fade/>
       </p:transition>
@@ -8122,13 +8123,13 @@
   <p:clrMapOvr>
     <a:masterClrMapping/>
   </p:clrMapOvr>
-  <mc:AlternateContent xmlns:mc="http://schemas.openxmlformats.org/markup-compatibility/2006" xmlns:p159="http://schemas.microsoft.com/office/powerpoint/2015/09/main">
-    <mc:Choice Requires="p159">
+  <mc:AlternateContent xmlns:mc="http://schemas.openxmlformats.org/markup-compatibility/2006">
+    <mc:Choice xmlns:p159="http://schemas.microsoft.com/office/powerpoint/2015/09/main" Requires="p159">
       <p:transition xmlns:p14="http://schemas.microsoft.com/office/powerpoint/2010/main" spd="slow" p14:dur="2000">
         <p159:morph option="byObject"/>
       </p:transition>
     </mc:Choice>
-    <mc:Fallback xmlns="">
+    <mc:Fallback>
       <p:transition spd="slow">
         <p:fade/>
       </p:transition>
@@ -8946,13 +8947,13 @@
   <p:clrMapOvr>
     <a:masterClrMapping/>
   </p:clrMapOvr>
-  <mc:AlternateContent xmlns:mc="http://schemas.openxmlformats.org/markup-compatibility/2006" xmlns:p159="http://schemas.microsoft.com/office/powerpoint/2015/09/main">
-    <mc:Choice Requires="p159">
+  <mc:AlternateContent xmlns:mc="http://schemas.openxmlformats.org/markup-compatibility/2006">
+    <mc:Choice xmlns:p159="http://schemas.microsoft.com/office/powerpoint/2015/09/main" Requires="p159">
       <p:transition xmlns:p14="http://schemas.microsoft.com/office/powerpoint/2010/main" spd="slow" p14:dur="2000">
         <p159:morph option="byObject"/>
       </p:transition>
     </mc:Choice>
-    <mc:Fallback xmlns="">
+    <mc:Fallback>
       <p:transition spd="slow">
         <p:fade/>
       </p:transition>
@@ -9726,13 +9727,13 @@
   <p:clrMapOvr>
     <a:masterClrMapping/>
   </p:clrMapOvr>
-  <mc:AlternateContent xmlns:mc="http://schemas.openxmlformats.org/markup-compatibility/2006" xmlns:p159="http://schemas.microsoft.com/office/powerpoint/2015/09/main">
-    <mc:Choice Requires="p159">
+  <mc:AlternateContent xmlns:mc="http://schemas.openxmlformats.org/markup-compatibility/2006">
+    <mc:Choice xmlns:p159="http://schemas.microsoft.com/office/powerpoint/2015/09/main" Requires="p159">
       <p:transition xmlns:p14="http://schemas.microsoft.com/office/powerpoint/2010/main" spd="slow" p14:dur="2000">
         <p159:morph option="byObject"/>
       </p:transition>
     </mc:Choice>
-    <mc:Fallback xmlns="">
+    <mc:Fallback>
       <p:transition spd="slow">
         <p:fade/>
       </p:transition>
@@ -10366,13 +10367,13 @@
   <p:clrMapOvr>
     <a:masterClrMapping/>
   </p:clrMapOvr>
-  <mc:AlternateContent xmlns:mc="http://schemas.openxmlformats.org/markup-compatibility/2006" xmlns:p159="http://schemas.microsoft.com/office/powerpoint/2015/09/main">
-    <mc:Choice Requires="p159">
+  <mc:AlternateContent xmlns:mc="http://schemas.openxmlformats.org/markup-compatibility/2006">
+    <mc:Choice xmlns:p159="http://schemas.microsoft.com/office/powerpoint/2015/09/main" Requires="p159">
       <p:transition xmlns:p14="http://schemas.microsoft.com/office/powerpoint/2010/main" spd="slow" p14:dur="2000">
         <p159:morph option="byObject"/>
       </p:transition>
     </mc:Choice>
-    <mc:Fallback xmlns="">
+    <mc:Fallback>
       <p:transition spd="slow">
         <p:fade/>
       </p:transition>
@@ -11105,13 +11106,13 @@
   <p:clrMapOvr>
     <a:masterClrMapping/>
   </p:clrMapOvr>
-  <mc:AlternateContent xmlns:mc="http://schemas.openxmlformats.org/markup-compatibility/2006" xmlns:p159="http://schemas.microsoft.com/office/powerpoint/2015/09/main">
-    <mc:Choice Requires="p159">
+  <mc:AlternateContent xmlns:mc="http://schemas.openxmlformats.org/markup-compatibility/2006">
+    <mc:Choice xmlns:p159="http://schemas.microsoft.com/office/powerpoint/2015/09/main" Requires="p159">
       <p:transition xmlns:p14="http://schemas.microsoft.com/office/powerpoint/2010/main" spd="slow" p14:dur="2000">
         <p159:morph option="byObject"/>
       </p:transition>
     </mc:Choice>
-    <mc:Fallback xmlns="">
+    <mc:Fallback>
       <p:transition spd="slow">
         <p:fade/>
       </p:transition>
@@ -11894,13 +11895,13 @@
   <p:clrMapOvr>
     <a:masterClrMapping/>
   </p:clrMapOvr>
-  <mc:AlternateContent xmlns:mc="http://schemas.openxmlformats.org/markup-compatibility/2006" xmlns:p159="http://schemas.microsoft.com/office/powerpoint/2015/09/main">
-    <mc:Choice Requires="p159">
+  <mc:AlternateContent xmlns:mc="http://schemas.openxmlformats.org/markup-compatibility/2006">
+    <mc:Choice xmlns:p159="http://schemas.microsoft.com/office/powerpoint/2015/09/main" Requires="p159">
       <p:transition xmlns:p14="http://schemas.microsoft.com/office/powerpoint/2010/main" spd="slow" p14:dur="2000">
         <p159:morph option="byObject"/>
       </p:transition>
     </mc:Choice>
-    <mc:Fallback xmlns="">
+    <mc:Fallback>
       <p:transition spd="slow">
         <p:fade/>
       </p:transition>
@@ -12629,6 +12630,61 @@
           </a:prstGeom>
         </p:spPr>
       </p:pic>
+      <p:pic>
+        <p:nvPicPr>
+          <p:cNvPr id="2" name="Picture 1">
+            <a:extLst>
+              <a:ext uri="{FF2B5EF4-FFF2-40B4-BE49-F238E27FC236}">
+                <a16:creationId xmlns:a16="http://schemas.microsoft.com/office/drawing/2014/main" id="{1BCE56F7-1C39-0958-5F13-A7628BD15356}"/>
+              </a:ext>
+            </a:extLst>
+          </p:cNvPr>
+          <p:cNvPicPr>
+            <a:picLocks noChangeAspect="1"/>
+          </p:cNvPicPr>
+          <p:nvPr/>
+        </p:nvPicPr>
+        <p:blipFill>
+          <a:blip r:embed="rId7">
+            <a:extLst>
+              <a:ext uri="{BEBA8EAE-BF5A-486C-A8C5-ECC9F3942E4B}">
+                <a14:imgProps xmlns:a14="http://schemas.microsoft.com/office/drawing/2010/main">
+                  <a14:imgLayer r:embed="rId8">
+                    <a14:imgEffect>
+                      <a14:backgroundRemoval t="586" b="98828" l="9961" r="89844">
+                        <a14:foregroundMark x1="12891" y1="8984" x2="12891" y2="8984"/>
+                        <a14:foregroundMark x1="23828" y1="22266" x2="23828" y2="22266"/>
+                        <a14:foregroundMark x1="47656" y1="586" x2="47656" y2="586"/>
+                        <a14:foregroundMark x1="47656" y1="7227" x2="47656" y2="7227"/>
+                        <a14:foregroundMark x1="73047" y1="20313" x2="73047" y2="20313"/>
+                        <a14:foregroundMark x1="71875" y1="98828" x2="71875" y2="98828"/>
+                        <a14:foregroundMark x1="46484" y1="92578" x2="46484" y2="92578"/>
+                        <a14:foregroundMark x1="30469" y1="73047" x2="30469" y2="73047"/>
+                        <a14:foregroundMark x1="19922" y1="71680" x2="19922" y2="71680"/>
+                      </a14:backgroundRemoval>
+                    </a14:imgEffect>
+                  </a14:imgLayer>
+                </a14:imgProps>
+              </a:ext>
+              <a:ext uri="{28A0092B-C50C-407E-A947-70E740481C1C}">
+                <a14:useLocalDpi xmlns:a14="http://schemas.microsoft.com/office/drawing/2010/main" val="0"/>
+              </a:ext>
+            </a:extLst>
+          </a:blip>
+          <a:stretch>
+            <a:fillRect/>
+          </a:stretch>
+        </p:blipFill>
+        <p:spPr>
+          <a:xfrm>
+            <a:off x="2747787" y="2652580"/>
+            <a:ext cx="874991" cy="874991"/>
+          </a:xfrm>
+          <a:prstGeom prst="rect">
+            <a:avLst/>
+          </a:prstGeom>
+        </p:spPr>
+      </p:pic>
     </p:spTree>
     <p:extLst>
       <p:ext uri="{BB962C8B-B14F-4D97-AF65-F5344CB8AC3E}">
@@ -12639,13 +12695,13 @@
   <p:clrMapOvr>
     <a:masterClrMapping/>
   </p:clrMapOvr>
-  <mc:AlternateContent xmlns:mc="http://schemas.openxmlformats.org/markup-compatibility/2006" xmlns:p159="http://schemas.microsoft.com/office/powerpoint/2015/09/main">
-    <mc:Choice Requires="p159">
+  <mc:AlternateContent xmlns:mc="http://schemas.openxmlformats.org/markup-compatibility/2006">
+    <mc:Choice xmlns:p159="http://schemas.microsoft.com/office/powerpoint/2015/09/main" Requires="p159">
       <p:transition xmlns:p14="http://schemas.microsoft.com/office/powerpoint/2010/main" spd="slow" p14:dur="2000">
         <p159:morph option="byObject"/>
       </p:transition>
     </mc:Choice>
-    <mc:Fallback xmlns="">
+    <mc:Fallback>
       <p:transition spd="slow">
         <p:fade/>
       </p:transition>
@@ -12655,6 +12711,511 @@
 </file>
 
 <file path=ppt/slides/slide18.xml><?xml version="1.0" encoding="utf-8"?>
+<p:sld xmlns:a="http://schemas.openxmlformats.org/drawingml/2006/main" xmlns:r="http://schemas.openxmlformats.org/officeDocument/2006/relationships" xmlns:p="http://schemas.openxmlformats.org/presentationml/2006/main">
+  <p:cSld>
+    <p:spTree>
+      <p:nvGrpSpPr>
+        <p:cNvPr id="1" name="">
+          <a:extLst>
+            <a:ext uri="{FF2B5EF4-FFF2-40B4-BE49-F238E27FC236}">
+              <a16:creationId xmlns:a16="http://schemas.microsoft.com/office/drawing/2014/main" id="{8D556A00-12F3-FA85-0A35-5DB0F64D137D}"/>
+            </a:ext>
+          </a:extLst>
+        </p:cNvPr>
+        <p:cNvGrpSpPr/>
+        <p:nvPr/>
+      </p:nvGrpSpPr>
+      <p:grpSpPr>
+        <a:xfrm>
+          <a:off x="0" y="0"/>
+          <a:ext cx="0" cy="0"/>
+          <a:chOff x="0" y="0"/>
+          <a:chExt cx="0" cy="0"/>
+        </a:xfrm>
+      </p:grpSpPr>
+      <p:pic>
+        <p:nvPicPr>
+          <p:cNvPr id="18" name="Picture 4" descr="This may contain: an abstract red background with lines and stars">
+            <a:extLst>
+              <a:ext uri="{FF2B5EF4-FFF2-40B4-BE49-F238E27FC236}">
+                <a16:creationId xmlns:a16="http://schemas.microsoft.com/office/drawing/2014/main" id="{786F771A-5E7A-029F-6917-469B85A30FCB}"/>
+              </a:ext>
+            </a:extLst>
+          </p:cNvPr>
+          <p:cNvPicPr>
+            <a:picLocks noChangeAspect="1" noChangeArrowheads="1"/>
+          </p:cNvPicPr>
+          <p:nvPr/>
+        </p:nvPicPr>
+        <p:blipFill>
+          <a:blip r:embed="rId2">
+            <a:alphaModFix amt="5000"/>
+            <a:extLst>
+              <a:ext uri="{28A0092B-C50C-407E-A947-70E740481C1C}">
+                <a14:useLocalDpi xmlns:a14="http://schemas.microsoft.com/office/drawing/2010/main" val="0"/>
+              </a:ext>
+            </a:extLst>
+          </a:blip>
+          <a:srcRect/>
+          <a:stretch>
+            <a:fillRect/>
+          </a:stretch>
+        </p:blipFill>
+        <p:spPr bwMode="auto">
+          <a:xfrm>
+            <a:off x="0" y="-2641600"/>
+            <a:ext cx="12192000" cy="12192000"/>
+          </a:xfrm>
+          <a:prstGeom prst="rect">
+            <a:avLst/>
+          </a:prstGeom>
+          <a:noFill/>
+          <a:extLst>
+            <a:ext uri="{909E8E84-426E-40DD-AFC4-6F175D3DCCD1}">
+              <a14:hiddenFill xmlns:a14="http://schemas.microsoft.com/office/drawing/2010/main">
+                <a:solidFill>
+                  <a:srgbClr val="FFFFFF"/>
+                </a:solidFill>
+              </a14:hiddenFill>
+            </a:ext>
+          </a:extLst>
+        </p:spPr>
+      </p:pic>
+      <p:sp>
+        <p:nvSpPr>
+          <p:cNvPr id="17" name="Circle: Hollow 16">
+            <a:extLst>
+              <a:ext uri="{FF2B5EF4-FFF2-40B4-BE49-F238E27FC236}">
+                <a16:creationId xmlns:a16="http://schemas.microsoft.com/office/drawing/2014/main" id="{0920FC47-E465-38C2-2205-DFF7AC6C37A1}"/>
+              </a:ext>
+            </a:extLst>
+          </p:cNvPr>
+          <p:cNvSpPr/>
+          <p:nvPr/>
+        </p:nvSpPr>
+        <p:spPr>
+          <a:xfrm>
+            <a:off x="-2376622" y="440054"/>
+            <a:ext cx="6389370" cy="5977890"/>
+          </a:xfrm>
+          <a:prstGeom prst="donut">
+            <a:avLst/>
+          </a:prstGeom>
+          <a:gradFill flip="none" rotWithShape="1">
+            <a:gsLst>
+              <a:gs pos="0">
+                <a:schemeClr val="tx1">
+                  <a:lumMod val="65000"/>
+                  <a:lumOff val="35000"/>
+                  <a:shade val="30000"/>
+                  <a:satMod val="115000"/>
+                </a:schemeClr>
+              </a:gs>
+              <a:gs pos="50000">
+                <a:schemeClr val="tx1">
+                  <a:lumMod val="65000"/>
+                  <a:lumOff val="35000"/>
+                  <a:shade val="67500"/>
+                  <a:satMod val="115000"/>
+                </a:schemeClr>
+              </a:gs>
+              <a:gs pos="100000">
+                <a:schemeClr val="tx1">
+                  <a:lumMod val="65000"/>
+                  <a:lumOff val="35000"/>
+                  <a:shade val="100000"/>
+                  <a:satMod val="115000"/>
+                </a:schemeClr>
+              </a:gs>
+            </a:gsLst>
+            <a:lin ang="5400000" scaled="1"/>
+            <a:tileRect/>
+          </a:gradFill>
+          <a:ln>
+            <a:solidFill>
+              <a:schemeClr val="tx1">
+                <a:lumMod val="65000"/>
+                <a:lumOff val="35000"/>
+              </a:schemeClr>
+            </a:solidFill>
+          </a:ln>
+        </p:spPr>
+        <p:style>
+          <a:lnRef idx="2">
+            <a:schemeClr val="accent1">
+              <a:shade val="15000"/>
+            </a:schemeClr>
+          </a:lnRef>
+          <a:fillRef idx="1">
+            <a:schemeClr val="accent1"/>
+          </a:fillRef>
+          <a:effectRef idx="0">
+            <a:schemeClr val="accent1"/>
+          </a:effectRef>
+          <a:fontRef idx="minor">
+            <a:schemeClr val="lt1"/>
+          </a:fontRef>
+        </p:style>
+        <p:txBody>
+          <a:bodyPr rtlCol="0" anchor="ctr"/>
+          <a:lstStyle/>
+          <a:p>
+            <a:pPr algn="ctr"/>
+            <a:endParaRPr lang="en-GB" dirty="0">
+              <a:solidFill>
+                <a:schemeClr val="tx1"/>
+              </a:solidFill>
+            </a:endParaRPr>
+          </a:p>
+        </p:txBody>
+      </p:sp>
+      <p:pic>
+        <p:nvPicPr>
+          <p:cNvPr id="6" name="Picture 5">
+            <a:extLst>
+              <a:ext uri="{FF2B5EF4-FFF2-40B4-BE49-F238E27FC236}">
+                <a16:creationId xmlns:a16="http://schemas.microsoft.com/office/drawing/2014/main" id="{1695EB2E-6095-FCAB-D6DF-9F4E33961A59}"/>
+              </a:ext>
+            </a:extLst>
+          </p:cNvPr>
+          <p:cNvPicPr>
+            <a:picLocks noChangeAspect="1"/>
+          </p:cNvPicPr>
+          <p:nvPr/>
+        </p:nvPicPr>
+        <p:blipFill>
+          <a:blip r:embed="rId3">
+            <a:alphaModFix amt="20000"/>
+            <a:extLst>
+              <a:ext uri="{28A0092B-C50C-407E-A947-70E740481C1C}">
+                <a14:useLocalDpi xmlns:a14="http://schemas.microsoft.com/office/drawing/2010/main" val="0"/>
+              </a:ext>
+            </a:extLst>
+          </a:blip>
+          <a:stretch>
+            <a:fillRect/>
+          </a:stretch>
+        </p:blipFill>
+        <p:spPr>
+          <a:xfrm>
+            <a:off x="2968670" y="-327668"/>
+            <a:ext cx="12288228" cy="9212383"/>
+          </a:xfrm>
+          <a:prstGeom prst="rect">
+            <a:avLst/>
+          </a:prstGeom>
+        </p:spPr>
+      </p:pic>
+      <p:sp>
+        <p:nvSpPr>
+          <p:cNvPr id="7" name="TextBox 6">
+            <a:extLst>
+              <a:ext uri="{FF2B5EF4-FFF2-40B4-BE49-F238E27FC236}">
+                <a16:creationId xmlns:a16="http://schemas.microsoft.com/office/drawing/2014/main" id="{1EA7F181-8977-1564-A0FB-84C7678A35AB}"/>
+              </a:ext>
+            </a:extLst>
+          </p:cNvPr>
+          <p:cNvSpPr txBox="1"/>
+          <p:nvPr/>
+        </p:nvSpPr>
+        <p:spPr>
+          <a:xfrm>
+            <a:off x="4372344" y="1282215"/>
+            <a:ext cx="7588848" cy="584775"/>
+          </a:xfrm>
+          <a:prstGeom prst="rect">
+            <a:avLst/>
+          </a:prstGeom>
+          <a:noFill/>
+        </p:spPr>
+        <p:txBody>
+          <a:bodyPr wrap="square" rtlCol="0">
+            <a:spAutoFit/>
+          </a:bodyPr>
+          <a:lstStyle/>
+          <a:p>
+            <a:pPr algn="ctr"/>
+            <a:r>
+              <a:rPr lang="en-GB" sz="3200" b="1" dirty="0">
+                <a:latin typeface="Times New Roman" panose="02020603050405020304" pitchFamily="18" charset="0"/>
+                <a:cs typeface="Times New Roman" panose="02020603050405020304" pitchFamily="18" charset="0"/>
+              </a:rPr>
+              <a:t>Social Media Presence</a:t>
+            </a:r>
+            <a:endParaRPr lang="en-US" sz="3200" b="1" dirty="0">
+              <a:latin typeface="Times New Roman" panose="02020603050405020304" pitchFamily="18" charset="0"/>
+              <a:cs typeface="Times New Roman" panose="02020603050405020304" pitchFamily="18" charset="0"/>
+            </a:endParaRPr>
+          </a:p>
+        </p:txBody>
+      </p:sp>
+      <p:pic>
+        <p:nvPicPr>
+          <p:cNvPr id="9" name="Picture 8">
+            <a:extLst>
+              <a:ext uri="{FF2B5EF4-FFF2-40B4-BE49-F238E27FC236}">
+                <a16:creationId xmlns:a16="http://schemas.microsoft.com/office/drawing/2014/main" id="{DF0EE001-FEB7-FD45-A325-A1DD47EE438A}"/>
+              </a:ext>
+            </a:extLst>
+          </p:cNvPr>
+          <p:cNvPicPr>
+            <a:picLocks noChangeAspect="1"/>
+          </p:cNvPicPr>
+          <p:nvPr/>
+        </p:nvPicPr>
+        <p:blipFill>
+          <a:blip r:embed="rId4"/>
+          <a:stretch>
+            <a:fillRect/>
+          </a:stretch>
+        </p:blipFill>
+        <p:spPr>
+          <a:xfrm>
+            <a:off x="363255" y="676058"/>
+            <a:ext cx="986230" cy="986230"/>
+          </a:xfrm>
+          <a:prstGeom prst="rect">
+            <a:avLst/>
+          </a:prstGeom>
+        </p:spPr>
+      </p:pic>
+      <p:pic>
+        <p:nvPicPr>
+          <p:cNvPr id="11" name="Picture 10">
+            <a:extLst>
+              <a:ext uri="{FF2B5EF4-FFF2-40B4-BE49-F238E27FC236}">
+                <a16:creationId xmlns:a16="http://schemas.microsoft.com/office/drawing/2014/main" id="{E53196F5-2ADE-D740-567F-63538EE2724A}"/>
+              </a:ext>
+            </a:extLst>
+          </p:cNvPr>
+          <p:cNvPicPr>
+            <a:picLocks noChangeAspect="1"/>
+          </p:cNvPicPr>
+          <p:nvPr/>
+        </p:nvPicPr>
+        <p:blipFill>
+          <a:blip r:embed="rId5"/>
+          <a:stretch>
+            <a:fillRect/>
+          </a:stretch>
+        </p:blipFill>
+        <p:spPr>
+          <a:xfrm>
+            <a:off x="1825535" y="922548"/>
+            <a:ext cx="1143135" cy="1143135"/>
+          </a:xfrm>
+          <a:prstGeom prst="rect">
+            <a:avLst/>
+          </a:prstGeom>
+        </p:spPr>
+      </p:pic>
+      <p:sp>
+        <p:nvSpPr>
+          <p:cNvPr id="3" name="Block Arc 2">
+            <a:extLst>
+              <a:ext uri="{FF2B5EF4-FFF2-40B4-BE49-F238E27FC236}">
+                <a16:creationId xmlns:a16="http://schemas.microsoft.com/office/drawing/2014/main" id="{867C8530-E410-E4CF-9E2B-9FD08F8DA0A0}"/>
+              </a:ext>
+            </a:extLst>
+          </p:cNvPr>
+          <p:cNvSpPr/>
+          <p:nvPr/>
+        </p:nvSpPr>
+        <p:spPr>
+          <a:xfrm rot="712185">
+            <a:off x="-2527300" y="177359"/>
+            <a:ext cx="6679362" cy="6503280"/>
+          </a:xfrm>
+          <a:prstGeom prst="blockArc">
+            <a:avLst>
+              <a:gd name="adj1" fmla="val 19460416"/>
+              <a:gd name="adj2" fmla="val 416114"/>
+              <a:gd name="adj3" fmla="val 30569"/>
+            </a:avLst>
+          </a:prstGeom>
+          <a:solidFill>
+            <a:schemeClr val="bg2">
+              <a:lumMod val="75000"/>
+            </a:schemeClr>
+          </a:solidFill>
+          <a:ln>
+            <a:solidFill>
+              <a:schemeClr val="bg2">
+                <a:lumMod val="75000"/>
+              </a:schemeClr>
+            </a:solidFill>
+          </a:ln>
+        </p:spPr>
+        <p:style>
+          <a:lnRef idx="2">
+            <a:schemeClr val="accent1">
+              <a:shade val="15000"/>
+            </a:schemeClr>
+          </a:lnRef>
+          <a:fillRef idx="1">
+            <a:schemeClr val="accent1"/>
+          </a:fillRef>
+          <a:effectRef idx="0">
+            <a:schemeClr val="accent1"/>
+          </a:effectRef>
+          <a:fontRef idx="minor">
+            <a:schemeClr val="lt1"/>
+          </a:fontRef>
+        </p:style>
+        <p:txBody>
+          <a:bodyPr rtlCol="0" anchor="ctr"/>
+          <a:lstStyle/>
+          <a:p>
+            <a:pPr algn="ctr"/>
+            <a:endParaRPr lang="en-GB" dirty="0">
+              <a:solidFill>
+                <a:schemeClr val="tx1"/>
+              </a:solidFill>
+            </a:endParaRPr>
+          </a:p>
+        </p:txBody>
+      </p:sp>
+      <p:pic>
+        <p:nvPicPr>
+          <p:cNvPr id="15" name="Picture 14">
+            <a:extLst>
+              <a:ext uri="{FF2B5EF4-FFF2-40B4-BE49-F238E27FC236}">
+                <a16:creationId xmlns:a16="http://schemas.microsoft.com/office/drawing/2014/main" id="{7DD6C72D-9577-7E52-600F-6695459C7372}"/>
+              </a:ext>
+            </a:extLst>
+          </p:cNvPr>
+          <p:cNvPicPr>
+            <a:picLocks noChangeAspect="1"/>
+          </p:cNvPicPr>
+          <p:nvPr/>
+        </p:nvPicPr>
+        <p:blipFill>
+          <a:blip r:embed="rId6"/>
+          <a:stretch>
+            <a:fillRect/>
+          </a:stretch>
+        </p:blipFill>
+        <p:spPr>
+          <a:xfrm rot="13622241">
+            <a:off x="763798" y="2763294"/>
+            <a:ext cx="1055797" cy="1055797"/>
+          </a:xfrm>
+          <a:prstGeom prst="rect">
+            <a:avLst/>
+          </a:prstGeom>
+        </p:spPr>
+      </p:pic>
+      <p:pic>
+        <p:nvPicPr>
+          <p:cNvPr id="4" name="Picture 3">
+            <a:extLst>
+              <a:ext uri="{FF2B5EF4-FFF2-40B4-BE49-F238E27FC236}">
+                <a16:creationId xmlns:a16="http://schemas.microsoft.com/office/drawing/2014/main" id="{A62E0D8C-4905-D577-11FC-B3965FEA6D30}"/>
+              </a:ext>
+            </a:extLst>
+          </p:cNvPr>
+          <p:cNvPicPr>
+            <a:picLocks noChangeAspect="1"/>
+          </p:cNvPicPr>
+          <p:nvPr/>
+        </p:nvPicPr>
+        <p:blipFill>
+          <a:blip r:embed="rId7"/>
+          <a:stretch>
+            <a:fillRect/>
+          </a:stretch>
+        </p:blipFill>
+        <p:spPr>
+          <a:xfrm>
+            <a:off x="7356957" y="2000250"/>
+            <a:ext cx="2415693" cy="4570380"/>
+          </a:xfrm>
+          <a:prstGeom prst="rect">
+            <a:avLst/>
+          </a:prstGeom>
+        </p:spPr>
+      </p:pic>
+      <p:pic>
+        <p:nvPicPr>
+          <p:cNvPr id="14" name="Picture 13">
+            <a:extLst>
+              <a:ext uri="{FF2B5EF4-FFF2-40B4-BE49-F238E27FC236}">
+                <a16:creationId xmlns:a16="http://schemas.microsoft.com/office/drawing/2014/main" id="{712BB25A-F954-74A0-27AA-35807211A181}"/>
+              </a:ext>
+            </a:extLst>
+          </p:cNvPr>
+          <p:cNvPicPr>
+            <a:picLocks noChangeAspect="1"/>
+          </p:cNvPicPr>
+          <p:nvPr/>
+        </p:nvPicPr>
+        <p:blipFill>
+          <a:blip r:embed="rId8">
+            <a:extLst>
+              <a:ext uri="{BEBA8EAE-BF5A-486C-A8C5-ECC9F3942E4B}">
+                <a14:imgProps xmlns:a14="http://schemas.microsoft.com/office/drawing/2010/main">
+                  <a14:imgLayer r:embed="rId9">
+                    <a14:imgEffect>
+                      <a14:backgroundRemoval t="586" b="98828" l="9961" r="89844">
+                        <a14:foregroundMark x1="12891" y1="8984" x2="12891" y2="8984"/>
+                        <a14:foregroundMark x1="23828" y1="22266" x2="23828" y2="22266"/>
+                        <a14:foregroundMark x1="47656" y1="586" x2="47656" y2="586"/>
+                        <a14:foregroundMark x1="47656" y1="7227" x2="47656" y2="7227"/>
+                        <a14:foregroundMark x1="73047" y1="20313" x2="73047" y2="20313"/>
+                        <a14:foregroundMark x1="71875" y1="98828" x2="71875" y2="98828"/>
+                        <a14:foregroundMark x1="46484" y1="92578" x2="46484" y2="92578"/>
+                        <a14:foregroundMark x1="30469" y1="73047" x2="30469" y2="73047"/>
+                        <a14:foregroundMark x1="19922" y1="71680" x2="19922" y2="71680"/>
+                      </a14:backgroundRemoval>
+                    </a14:imgEffect>
+                  </a14:imgLayer>
+                </a14:imgProps>
+              </a:ext>
+              <a:ext uri="{28A0092B-C50C-407E-A947-70E740481C1C}">
+                <a14:useLocalDpi xmlns:a14="http://schemas.microsoft.com/office/drawing/2010/main" val="0"/>
+              </a:ext>
+            </a:extLst>
+          </a:blip>
+          <a:stretch>
+            <a:fillRect/>
+          </a:stretch>
+        </p:blipFill>
+        <p:spPr>
+          <a:xfrm>
+            <a:off x="2709919" y="2554009"/>
+            <a:ext cx="1302829" cy="1302829"/>
+          </a:xfrm>
+          <a:prstGeom prst="rect">
+            <a:avLst/>
+          </a:prstGeom>
+        </p:spPr>
+      </p:pic>
+    </p:spTree>
+    <p:extLst>
+      <p:ext uri="{BB962C8B-B14F-4D97-AF65-F5344CB8AC3E}">
+        <p14:creationId xmlns:p14="http://schemas.microsoft.com/office/powerpoint/2010/main" val="2946143286"/>
+      </p:ext>
+    </p:extLst>
+  </p:cSld>
+  <p:clrMapOvr>
+    <a:masterClrMapping/>
+  </p:clrMapOvr>
+  <mc:AlternateContent xmlns:mc="http://schemas.openxmlformats.org/markup-compatibility/2006">
+    <mc:Choice xmlns:p159="http://schemas.microsoft.com/office/powerpoint/2015/09/main" Requires="p159">
+      <p:transition xmlns:p14="http://schemas.microsoft.com/office/powerpoint/2010/main" spd="slow" p14:dur="2000">
+        <p159:morph option="byObject"/>
+      </p:transition>
+    </mc:Choice>
+    <mc:Fallback>
+      <p:transition spd="slow">
+        <p:fade/>
+      </p:transition>
+    </mc:Fallback>
+  </mc:AlternateContent>
+</p:sld>
+</file>
+
+<file path=ppt/slides/slide19.xml><?xml version="1.0" encoding="utf-8"?>
 <p:sld xmlns:a="http://schemas.openxmlformats.org/drawingml/2006/main" xmlns:r="http://schemas.openxmlformats.org/officeDocument/2006/relationships" xmlns:p="http://schemas.openxmlformats.org/presentationml/2006/main">
   <p:cSld>
     <p:spTree>
@@ -12825,13 +13386,13 @@
   <p:clrMapOvr>
     <a:masterClrMapping/>
   </p:clrMapOvr>
-  <mc:AlternateContent xmlns:mc="http://schemas.openxmlformats.org/markup-compatibility/2006" xmlns:p159="http://schemas.microsoft.com/office/powerpoint/2015/09/main">
-    <mc:Choice Requires="p159">
+  <mc:AlternateContent xmlns:mc="http://schemas.openxmlformats.org/markup-compatibility/2006">
+    <mc:Choice xmlns:p159="http://schemas.microsoft.com/office/powerpoint/2015/09/main" Requires="p159">
       <p:transition xmlns:p14="http://schemas.microsoft.com/office/powerpoint/2010/main" spd="slow" p14:dur="2000">
         <p159:morph option="byObject"/>
       </p:transition>
     </mc:Choice>
-    <mc:Fallback xmlns="">
+    <mc:Fallback>
       <p:transition spd="slow">
         <p:fade/>
       </p:transition>
@@ -13305,13 +13866,13 @@
   <p:clrMapOvr>
     <a:masterClrMapping/>
   </p:clrMapOvr>
-  <mc:AlternateContent xmlns:mc="http://schemas.openxmlformats.org/markup-compatibility/2006" xmlns:p159="http://schemas.microsoft.com/office/powerpoint/2015/09/main">
-    <mc:Choice Requires="p159">
+  <mc:AlternateContent xmlns:mc="http://schemas.openxmlformats.org/markup-compatibility/2006">
+    <mc:Choice xmlns:p159="http://schemas.microsoft.com/office/powerpoint/2015/09/main" Requires="p159">
       <p:transition xmlns:p14="http://schemas.microsoft.com/office/powerpoint/2010/main" spd="slow" p14:dur="2000">
         <p159:morph option="byObject"/>
       </p:transition>
     </mc:Choice>
-    <mc:Fallback xmlns="">
+    <mc:Fallback>
       <p:transition spd="slow">
         <p:fade/>
       </p:transition>
@@ -13949,13 +14510,13 @@
   <p:clrMapOvr>
     <a:masterClrMapping/>
   </p:clrMapOvr>
-  <mc:AlternateContent xmlns:mc="http://schemas.openxmlformats.org/markup-compatibility/2006" xmlns:p159="http://schemas.microsoft.com/office/powerpoint/2015/09/main">
-    <mc:Choice Requires="p159">
+  <mc:AlternateContent xmlns:mc="http://schemas.openxmlformats.org/markup-compatibility/2006">
+    <mc:Choice xmlns:p159="http://schemas.microsoft.com/office/powerpoint/2015/09/main" Requires="p159">
       <p:transition xmlns:p14="http://schemas.microsoft.com/office/powerpoint/2010/main" spd="slow" p14:dur="2000">
         <p159:morph option="byObject"/>
       </p:transition>
     </mc:Choice>
-    <mc:Fallback xmlns="">
+    <mc:Fallback>
       <p:transition spd="slow">
         <p:fade/>
       </p:transition>
@@ -15132,13 +15693,13 @@
   <p:clrMapOvr>
     <a:masterClrMapping/>
   </p:clrMapOvr>
-  <mc:AlternateContent xmlns:mc="http://schemas.openxmlformats.org/markup-compatibility/2006" xmlns:p159="http://schemas.microsoft.com/office/powerpoint/2015/09/main">
-    <mc:Choice Requires="p159">
+  <mc:AlternateContent xmlns:mc="http://schemas.openxmlformats.org/markup-compatibility/2006">
+    <mc:Choice xmlns:p159="http://schemas.microsoft.com/office/powerpoint/2015/09/main" Requires="p159">
       <p:transition xmlns:p14="http://schemas.microsoft.com/office/powerpoint/2010/main" spd="slow" p14:dur="2000">
         <p159:morph option="byObject"/>
       </p:transition>
     </mc:Choice>
-    <mc:Fallback xmlns="">
+    <mc:Fallback>
       <p:transition spd="slow">
         <p:fade/>
       </p:transition>
@@ -16096,13 +16657,13 @@
   <p:clrMapOvr>
     <a:masterClrMapping/>
   </p:clrMapOvr>
-  <mc:AlternateContent xmlns:mc="http://schemas.openxmlformats.org/markup-compatibility/2006" xmlns:p159="http://schemas.microsoft.com/office/powerpoint/2015/09/main">
-    <mc:Choice Requires="p159">
+  <mc:AlternateContent xmlns:mc="http://schemas.openxmlformats.org/markup-compatibility/2006">
+    <mc:Choice xmlns:p159="http://schemas.microsoft.com/office/powerpoint/2015/09/main" Requires="p159">
       <p:transition xmlns:p14="http://schemas.microsoft.com/office/powerpoint/2010/main" spd="slow" p14:dur="2000">
         <p159:morph option="byObject"/>
       </p:transition>
     </mc:Choice>
-    <mc:Fallback xmlns="">
+    <mc:Fallback>
       <p:transition spd="slow">
         <p:fade/>
       </p:transition>
@@ -17005,13 +17566,13 @@
   <p:clrMapOvr>
     <a:masterClrMapping/>
   </p:clrMapOvr>
-  <mc:AlternateContent xmlns:mc="http://schemas.openxmlformats.org/markup-compatibility/2006" xmlns:p159="http://schemas.microsoft.com/office/powerpoint/2015/09/main">
-    <mc:Choice Requires="p159">
+  <mc:AlternateContent xmlns:mc="http://schemas.openxmlformats.org/markup-compatibility/2006">
+    <mc:Choice xmlns:p159="http://schemas.microsoft.com/office/powerpoint/2015/09/main" Requires="p159">
       <p:transition xmlns:p14="http://schemas.microsoft.com/office/powerpoint/2010/main" spd="slow" p14:dur="2000">
         <p159:morph option="byObject"/>
       </p:transition>
     </mc:Choice>
-    <mc:Fallback xmlns="">
+    <mc:Fallback>
       <p:transition spd="slow">
         <p:fade/>
       </p:transition>
@@ -17867,13 +18428,13 @@
   <p:clrMapOvr>
     <a:masterClrMapping/>
   </p:clrMapOvr>
-  <mc:AlternateContent xmlns:mc="http://schemas.openxmlformats.org/markup-compatibility/2006" xmlns:p159="http://schemas.microsoft.com/office/powerpoint/2015/09/main">
-    <mc:Choice Requires="p159">
+  <mc:AlternateContent xmlns:mc="http://schemas.openxmlformats.org/markup-compatibility/2006">
+    <mc:Choice xmlns:p159="http://schemas.microsoft.com/office/powerpoint/2015/09/main" Requires="p159">
       <p:transition xmlns:p14="http://schemas.microsoft.com/office/powerpoint/2010/main" spd="slow" p14:dur="2000">
         <p159:morph option="byObject"/>
       </p:transition>
     </mc:Choice>
-    <mc:Fallback xmlns="">
+    <mc:Fallback>
       <p:transition spd="slow">
         <p:fade/>
       </p:transition>
@@ -18517,13 +19078,13 @@
   <p:clrMapOvr>
     <a:masterClrMapping/>
   </p:clrMapOvr>
-  <mc:AlternateContent xmlns:mc="http://schemas.openxmlformats.org/markup-compatibility/2006" xmlns:p159="http://schemas.microsoft.com/office/powerpoint/2015/09/main">
-    <mc:Choice Requires="p159">
+  <mc:AlternateContent xmlns:mc="http://schemas.openxmlformats.org/markup-compatibility/2006">
+    <mc:Choice xmlns:p159="http://schemas.microsoft.com/office/powerpoint/2015/09/main" Requires="p159">
       <p:transition xmlns:p14="http://schemas.microsoft.com/office/powerpoint/2010/main" spd="slow" p14:dur="2000">
         <p159:morph option="byObject"/>
       </p:transition>
     </mc:Choice>
-    <mc:Fallback xmlns="">
+    <mc:Fallback>
       <p:transition spd="slow">
         <p:fade/>
       </p:transition>
@@ -19456,13 +20017,13 @@
   <p:clrMapOvr>
     <a:masterClrMapping/>
   </p:clrMapOvr>
-  <mc:AlternateContent xmlns:mc="http://schemas.openxmlformats.org/markup-compatibility/2006" xmlns:p159="http://schemas.microsoft.com/office/powerpoint/2015/09/main">
-    <mc:Choice Requires="p159">
+  <mc:AlternateContent xmlns:mc="http://schemas.openxmlformats.org/markup-compatibility/2006">
+    <mc:Choice xmlns:p159="http://schemas.microsoft.com/office/powerpoint/2015/09/main" Requires="p159">
       <p:transition xmlns:p14="http://schemas.microsoft.com/office/powerpoint/2010/main" spd="slow" p14:dur="2000">
         <p159:morph option="byObject"/>
       </p:transition>
     </mc:Choice>
-    <mc:Fallback xmlns="">
+    <mc:Fallback>
       <p:transition spd="slow">
         <p:fade/>
       </p:transition>
